--- a/exports/pptx/lessons/middle-module-05-dot-addition/day-05-mid-module-check.pptx
+++ b/exports/pptx/lessons/middle-module-05-dot-addition/day-05-mid-module-check.pptx
@@ -18,9 +18,11 @@
     <p:sldId id="266" r:id="rId12"/>
     <p:sldId id="267" r:id="rId13"/>
     <p:sldId id="268" r:id="rId14"/>
+    <p:sldId id="269" r:id="rId15"/>
+    <p:sldId id="270" r:id="rId16"/>
   </p:sldIdLst>
   <p:notesMasterIdLst>
-    <p:notesMasterId r:id="rId15"/>
+    <p:notesMasterId r:id="rId17"/>
   </p:notesMasterIdLst>
   <p:sldSz cx="9144000" cy="5143500"/>
   <p:notesSz cx="5143500" cy="9144000"/>
@@ -890,6 +892,182 @@
             <a:fld id="{F7021451-1387-4CA6-816F-3879F97B5CBC}" type="slidenum">
               <a:rPr lang="en-US"/>
               <a:t>13</a:t>
+            </a:fld>
+            <a:endParaRPr lang="en-US"/>
+          </a:p>
+        </p:txBody>
+      </p:sp>
+    </p:spTree>
+    <p:extLst>
+      <p:ext uri="{BB962C8B-B14F-4D97-AF65-F5344CB8AC3E}">
+        <p14:creationId xmlns:p14="http://schemas.microsoft.com/office/powerpoint/2010/main" val="1024086991"/>
+      </p:ext>
+    </p:extLst>
+  </p:cSld>
+  <p:clrMapOvr>
+    <a:masterClrMapping/>
+  </p:clrMapOvr>
+</p:notes>
+</file>
+
+<file path=ppt/notesSlides/notesSlide14.xml><?xml version="1.0" encoding="utf-8"?>
+<p:notes xmlns:a="http://schemas.openxmlformats.org/drawingml/2006/main" xmlns:r="http://schemas.openxmlformats.org/officeDocument/2006/relationships" xmlns:p="http://schemas.openxmlformats.org/presentationml/2006/main">
+  <p:cSld>
+    <p:spTree>
+      <p:nvGrpSpPr>
+        <p:cNvPr id="1" name=""/>
+        <p:cNvGrpSpPr/>
+        <p:nvPr/>
+      </p:nvGrpSpPr>
+      <p:grpSpPr>
+        <a:xfrm>
+          <a:off x="0" y="0"/>
+          <a:ext cx="0" cy="0"/>
+          <a:chOff x="0" y="0"/>
+          <a:chExt cx="0" cy="0"/>
+        </a:xfrm>
+      </p:grpSpPr>
+      <p:sp>
+        <p:nvSpPr>
+          <p:cNvPr id="2" name="Slide Image Placeholder 1"/>
+          <p:cNvSpPr>
+            <a:spLocks noGrp="1" noRot="1" noChangeAspect="1"/>
+          </p:cNvSpPr>
+          <p:nvPr>
+            <p:ph type="sldImg"/>
+          </p:nvPr>
+        </p:nvSpPr>
+        <p:spPr/>
+      </p:sp>
+      <p:sp>
+        <p:nvSpPr>
+          <p:cNvPr id="3" name="Notes Placeholder 2"/>
+          <p:cNvSpPr>
+            <a:spLocks noGrp="1"/>
+          </p:cNvSpPr>
+          <p:nvPr>
+            <p:ph type="body" idx="1"/>
+          </p:nvPr>
+        </p:nvSpPr>
+        <p:spPr/>
+        <p:txBody>
+          <a:bodyPr/>
+          <a:lstStyle/>
+          <a:p>
+            <a:r>
+              <a:rPr lang="en-US" dirty="0"/>
+              <a:t/>
+            </a:r>
+            <a:endParaRPr lang="en-US" dirty="0"/>
+          </a:p>
+        </p:txBody>
+      </p:sp>
+      <p:sp>
+        <p:nvSpPr>
+          <p:cNvPr id="4" name="Slide Number Placeholder 3"/>
+          <p:cNvSpPr>
+            <a:spLocks noGrp="1"/>
+          </p:cNvSpPr>
+          <p:nvPr>
+            <p:ph type="sldNum" sz="quarter" idx="10"/>
+          </p:nvPr>
+        </p:nvSpPr>
+        <p:spPr/>
+        <p:txBody>
+          <a:bodyPr/>
+          <a:lstStyle/>
+          <a:p>
+            <a:fld id="{F7021451-1387-4CA6-816F-3879F97B5CBC}" type="slidenum">
+              <a:rPr lang="en-US"/>
+              <a:t>14</a:t>
+            </a:fld>
+            <a:endParaRPr lang="en-US"/>
+          </a:p>
+        </p:txBody>
+      </p:sp>
+    </p:spTree>
+    <p:extLst>
+      <p:ext uri="{BB962C8B-B14F-4D97-AF65-F5344CB8AC3E}">
+        <p14:creationId xmlns:p14="http://schemas.microsoft.com/office/powerpoint/2010/main" val="1024086991"/>
+      </p:ext>
+    </p:extLst>
+  </p:cSld>
+  <p:clrMapOvr>
+    <a:masterClrMapping/>
+  </p:clrMapOvr>
+</p:notes>
+</file>
+
+<file path=ppt/notesSlides/notesSlide15.xml><?xml version="1.0" encoding="utf-8"?>
+<p:notes xmlns:a="http://schemas.openxmlformats.org/drawingml/2006/main" xmlns:r="http://schemas.openxmlformats.org/officeDocument/2006/relationships" xmlns:p="http://schemas.openxmlformats.org/presentationml/2006/main">
+  <p:cSld>
+    <p:spTree>
+      <p:nvGrpSpPr>
+        <p:cNvPr id="1" name=""/>
+        <p:cNvGrpSpPr/>
+        <p:nvPr/>
+      </p:nvGrpSpPr>
+      <p:grpSpPr>
+        <a:xfrm>
+          <a:off x="0" y="0"/>
+          <a:ext cx="0" cy="0"/>
+          <a:chOff x="0" y="0"/>
+          <a:chExt cx="0" cy="0"/>
+        </a:xfrm>
+      </p:grpSpPr>
+      <p:sp>
+        <p:nvSpPr>
+          <p:cNvPr id="2" name="Slide Image Placeholder 1"/>
+          <p:cNvSpPr>
+            <a:spLocks noGrp="1" noRot="1" noChangeAspect="1"/>
+          </p:cNvSpPr>
+          <p:nvPr>
+            <p:ph type="sldImg"/>
+          </p:nvPr>
+        </p:nvSpPr>
+        <p:spPr/>
+      </p:sp>
+      <p:sp>
+        <p:nvSpPr>
+          <p:cNvPr id="3" name="Notes Placeholder 2"/>
+          <p:cNvSpPr>
+            <a:spLocks noGrp="1"/>
+          </p:cNvSpPr>
+          <p:nvPr>
+            <p:ph type="body" idx="1"/>
+          </p:nvPr>
+        </p:nvSpPr>
+        <p:spPr/>
+        <p:txBody>
+          <a:bodyPr/>
+          <a:lstStyle/>
+          <a:p>
+            <a:r>
+              <a:rPr lang="en-US" dirty="0"/>
+              <a:t/>
+            </a:r>
+            <a:endParaRPr lang="en-US" dirty="0"/>
+          </a:p>
+        </p:txBody>
+      </p:sp>
+      <p:sp>
+        <p:nvSpPr>
+          <p:cNvPr id="4" name="Slide Number Placeholder 3"/>
+          <p:cNvSpPr>
+            <a:spLocks noGrp="1"/>
+          </p:cNvSpPr>
+          <p:nvPr>
+            <p:ph type="sldNum" sz="quarter" idx="10"/>
+          </p:nvPr>
+        </p:nvSpPr>
+        <p:spPr/>
+        <p:txBody>
+          <a:bodyPr/>
+          <a:lstStyle/>
+          <a:p>
+            <a:fld id="{F7021451-1387-4CA6-816F-3879F97B5CBC}" type="slidenum">
+              <a:rPr lang="en-US"/>
+              <a:t>15</a:t>
             </a:fld>
             <a:endParaRPr lang="en-US"/>
           </a:p>
@@ -2189,102 +2367,6 @@
         </p:nvSpPr>
         <p:spPr>
           <a:xfrm>
-            <a:off x="406301" y="1223963"/>
-            <a:ext cx="8498026" cy="274290"/>
-          </a:xfrm>
-          <a:prstGeom prst="rect">
-            <a:avLst/>
-          </a:prstGeom>
-          <a:noFill/>
-          <a:ln/>
-        </p:spPr>
-        <p:txBody>
-          <a:bodyPr wrap="square" lIns="0" tIns="0" rIns="0" bIns="0" rtlCol="0" anchor="t"/>
-          <a:lstStyle/>
-          <a:p>
-            <a:pPr algn="l" indent="0" marL="0">
-              <a:lnSpc>
-                <a:spcPts val="2160"/>
-              </a:lnSpc>
-              <a:spcBef>
-                <a:spcPts val="600"/>
-              </a:spcBef>
-              <a:spcAft>
-                <a:spcPts val="800"/>
-              </a:spcAft>
-              <a:buNone/>
-            </a:pPr>
-            <a:r>
-              <a:rPr lang="en-US" sz="1800" b="1" dirty="0">
-                <a:solidFill>
-                  <a:srgbClr val="FE4447"/>
-                </a:solidFill>
-                <a:latin typeface="Georgia" pitchFamily="34" charset="0"/>
-                <a:ea typeface="Georgia" pitchFamily="34" charset="-122"/>
-                <a:cs typeface="Georgia" pitchFamily="34" charset="-120"/>
-              </a:rPr>
-              <a:t>Learning objective</a:t>
-            </a:r>
-            <a:endParaRPr lang="en-US" sz="1800" dirty="0"/>
-          </a:p>
-        </p:txBody>
-      </p:sp>
-      <p:sp>
-        <p:nvSpPr>
-          <p:cNvPr id="6" name="Text 4"/>
-          <p:cNvSpPr/>
-          <p:nvPr/>
-        </p:nvSpPr>
-        <p:spPr>
-          <a:xfrm>
-            <a:off x="406301" y="1637854"/>
-            <a:ext cx="8498026" cy="426541"/>
-          </a:xfrm>
-          <a:prstGeom prst="rect">
-            <a:avLst/>
-          </a:prstGeom>
-          <a:noFill/>
-          <a:ln/>
-        </p:spPr>
-        <p:txBody>
-          <a:bodyPr wrap="square" lIns="0" tIns="0" rIns="0" bIns="0" rtlCol="0" anchor="t"/>
-          <a:lstStyle/>
-          <a:p>
-            <a:pPr algn="l" indent="0" marL="0">
-              <a:lnSpc>
-                <a:spcPts val="1680"/>
-              </a:lnSpc>
-              <a:spcBef>
-                <a:spcPts val="300"/>
-              </a:spcBef>
-              <a:spcAft>
-                <a:spcPts val="300"/>
-              </a:spcAft>
-              <a:buNone/>
-            </a:pPr>
-            <a:r>
-              <a:rPr lang="en-US" sz="1200" dirty="0">
-                <a:solidFill>
-                  <a:srgbClr val="1C2833"/>
-                </a:solidFill>
-                <a:latin typeface="Arial" pitchFamily="34" charset="0"/>
-                <a:ea typeface="Arial" pitchFamily="34" charset="-122"/>
-                <a:cs typeface="Arial" pitchFamily="34" charset="-120"/>
-              </a:rPr>
-              <a:t>By the end of this lesson, students will retest their Day 1 baseline using the dot method and submit a project plan paragraph.</a:t>
-            </a:r>
-            <a:endParaRPr lang="en-US" sz="1200" dirty="0"/>
-          </a:p>
-        </p:txBody>
-      </p:sp>
-      <p:sp>
-        <p:nvSpPr>
-          <p:cNvPr id="7" name="Text 5"/>
-          <p:cNvSpPr/>
-          <p:nvPr/>
-        </p:nvSpPr>
-        <p:spPr>
-          <a:xfrm>
             <a:off x="406301" y="4434929"/>
             <a:ext cx="8498026" cy="213271"/>
           </a:xfrm>
@@ -2429,7 +2511,7 @@
                 <a:ea typeface="Georgia" pitchFamily="34" charset="-122"/>
                 <a:cs typeface="Georgia" pitchFamily="34" charset="-120"/>
               </a:rPr>
-              <a:t>Homework</a:t>
+              <a:t>Wrap-up (7 min)</a:t>
             </a:r>
             <a:endParaRPr lang="en-US" sz="1800" dirty="0"/>
           </a:p>
@@ -2443,8 +2525,8 @@
         </p:nvSpPr>
         <p:spPr>
           <a:xfrm>
-            <a:off x="406301" y="870942"/>
-            <a:ext cx="8498026" cy="213271"/>
+            <a:off x="634901" y="883593"/>
+            <a:ext cx="8102798" cy="769441"/>
           </a:xfrm>
           <a:prstGeom prst="rect">
             <a:avLst/>
@@ -2456,17 +2538,83 @@
           <a:bodyPr wrap="square" lIns="0" tIns="0" rIns="0" bIns="0" rtlCol="0" anchor="t"/>
           <a:lstStyle/>
           <a:p>
+            <a:pPr algn="l" marL="342900" indent="-342900">
+              <a:lnSpc>
+                <a:spcPts val="1620"/>
+              </a:lnSpc>
+              <a:spcAft>
+                <a:spcPts val="300"/>
+              </a:spcAft>
+              <a:buSzPct val="100000"/>
+              <a:buChar char="•"/>
+            </a:pPr>
+            <a:r>
+              <a:rPr lang="en-US" sz="1200" dirty="0">
+                <a:solidFill>
+                  <a:srgbClr val="1C2833"/>
+                </a:solidFill>
+                <a:latin typeface="Arial" pitchFamily="34" charset="0"/>
+                <a:ea typeface="Arial" pitchFamily="34" charset="-122"/>
+                <a:cs typeface="Arial" pitchFamily="34" charset="-120"/>
+              </a:rPr>
+              <a:t>Show of hands by gain category: &lt;0% (slower), 0–25% faster, 25–50% faster, 50%+ faster.</a:t>
+            </a:r>
+            <a:endParaRPr lang="en-US" sz="1200" dirty="0"/>
+          </a:p>
+          <a:p>
+            <a:pPr algn="l" marL="342900" indent="-342900">
+              <a:lnSpc>
+                <a:spcPts val="1620"/>
+              </a:lnSpc>
+              <a:spcAft>
+                <a:spcPts val="300"/>
+              </a:spcAft>
+              <a:buSzPct val="100000"/>
+              <a:buChar char="•"/>
+            </a:pPr>
+            <a:r>
+              <a:rPr lang="en-US" sz="1200" dirty="0">
+                <a:solidFill>
+                  <a:srgbClr val="1C2833"/>
+                </a:solidFill>
+                <a:latin typeface="Arial" pitchFamily="34" charset="0"/>
+                <a:ea typeface="Arial" pitchFamily="34" charset="-122"/>
+                <a:cs typeface="Arial" pitchFamily="34" charset="-120"/>
+              </a:rPr>
+              <a:t>Note: </a:t>
+            </a:r>
             <a:pPr algn="l" indent="0" marL="0">
               <a:lnSpc>
-                <a:spcPts val="1680"/>
-              </a:lnSpc>
-              <a:spcBef>
-                <a:spcPts val="300"/>
-              </a:spcBef>
-              <a:spcAft>
-                <a:spcPts val="300"/>
-              </a:spcAft>
-              <a:buNone/>
+                <a:spcPts val="1620"/>
+              </a:lnSpc>
+              <a:spcAft>
+                <a:spcPts val="300"/>
+              </a:spcAft>
+              <a:buNone/>
+            </a:pPr>
+            <a:r>
+              <a:rPr lang="en-US" sz="1200" i="1" dirty="0">
+                <a:solidFill>
+                  <a:srgbClr val="1C2833"/>
+                </a:solidFill>
+                <a:latin typeface="Arial" pitchFamily="34" charset="0"/>
+                <a:ea typeface="Arial" pitchFamily="34" charset="-122"/>
+                <a:cs typeface="Arial" pitchFamily="34" charset="-120"/>
+              </a:rPr>
+              <a:t>"Whatever your gain, you've learned a real technique that will keep speeding up with use."</a:t>
+            </a:r>
+            <a:endParaRPr lang="en-US" sz="1200" dirty="0"/>
+          </a:p>
+          <a:p>
+            <a:pPr algn="l" marL="342900" indent="-342900">
+              <a:lnSpc>
+                <a:spcPts val="1620"/>
+              </a:lnSpc>
+              <a:spcAft>
+                <a:spcPts val="300"/>
+              </a:spcAft>
+              <a:buSzPct val="100000"/>
+              <a:buChar char="•"/>
             </a:pPr>
             <a:r>
               <a:rPr lang="en-US" sz="1200" dirty="0">
@@ -2477,7 +2625,67 @@
                 <a:ea typeface="Arial" pitchFamily="34" charset="-122"/>
                 <a:cs typeface="Arial" pitchFamily="34" charset="-120"/>
               </a:rPr>
-              <a:t>– Submit project plan paragraph (one paragraph, 4–6 sentences) by tomorrow morning. – Begin gathering materials.</a:t>
+              <a:t>Preview Day 6: </a:t>
+            </a:r>
+            <a:pPr algn="l" indent="0" marL="0">
+              <a:lnSpc>
+                <a:spcPts val="1620"/>
+              </a:lnSpc>
+              <a:spcAft>
+                <a:spcPts val="300"/>
+              </a:spcAft>
+              <a:buNone/>
+            </a:pPr>
+            <a:r>
+              <a:rPr lang="en-US" sz="1200" i="1" dirty="0">
+                <a:solidFill>
+                  <a:srgbClr val="1C2833"/>
+                </a:solidFill>
+                <a:latin typeface="Arial" pitchFamily="34" charset="0"/>
+                <a:ea typeface="Arial" pitchFamily="34" charset="-122"/>
+                <a:cs typeface="Arial" pitchFamily="34" charset="-120"/>
+              </a:rPr>
+              <a:t>"Tomorrow we ask:</a:t>
+            </a:r>
+            <a:pPr algn="l" indent="0" marL="0">
+              <a:lnSpc>
+                <a:spcPts val="1620"/>
+              </a:lnSpc>
+              <a:spcAft>
+                <a:spcPts val="300"/>
+              </a:spcAft>
+              <a:buNone/>
+            </a:pPr>
+            <a:r>
+              <a:rPr lang="en-US" sz="1200" dirty="0">
+                <a:solidFill>
+                  <a:srgbClr val="1C2833"/>
+                </a:solidFill>
+                <a:latin typeface="Arial" pitchFamily="34" charset="0"/>
+                <a:ea typeface="Arial" pitchFamily="34" charset="-122"/>
+                <a:cs typeface="Arial" pitchFamily="34" charset="-120"/>
+              </a:rPr>
+              <a:t>why</a:t>
+            </a:r>
+            <a:pPr algn="l" indent="0" marL="0">
+              <a:lnSpc>
+                <a:spcPts val="1620"/>
+              </a:lnSpc>
+              <a:spcAft>
+                <a:spcPts val="300"/>
+              </a:spcAft>
+              <a:buNone/>
+            </a:pPr>
+            <a:r>
+              <a:rPr lang="en-US" sz="1200" i="1" dirty="0">
+                <a:solidFill>
+                  <a:srgbClr val="1C2833"/>
+                </a:solidFill>
+                <a:latin typeface="Arial" pitchFamily="34" charset="0"/>
+                <a:ea typeface="Arial" pitchFamily="34" charset="-122"/>
+                <a:cs typeface="Arial" pitchFamily="34" charset="-120"/>
+              </a:rPr>
+              <a:t> does this work? You'll write a paragraph explaining it in your own words."</a:t>
             </a:r>
             <a:endParaRPr lang="en-US" sz="1200" dirty="0"/>
           </a:p>
@@ -2635,7 +2843,7 @@
                 <a:ea typeface="Georgia" pitchFamily="34" charset="-122"/>
                 <a:cs typeface="Georgia" pitchFamily="34" charset="-120"/>
               </a:rPr>
-              <a:t>Differentiation</a:t>
+              <a:t>Student-facing content</a:t>
             </a:r>
             <a:endParaRPr lang="en-US" sz="1800" dirty="0"/>
           </a:p>
@@ -2649,8 +2857,61 @@
         </p:nvSpPr>
         <p:spPr>
           <a:xfrm>
-            <a:off x="634901" y="883593"/>
-            <a:ext cx="8102798" cy="731341"/>
+            <a:off x="406301" y="883593"/>
+            <a:ext cx="8331398" cy="2764631"/>
+          </a:xfrm>
+          <a:prstGeom prst="rect">
+            <a:avLst/>
+          </a:prstGeom>
+          <a:solidFill>
+            <a:srgbClr val="F4F8F9"/>
+          </a:solidFill>
+          <a:ln/>
+        </p:spPr>
+        <p:txBody>
+          <a:bodyPr wrap="square" rtlCol="0" anchor="ctr"/>
+          <a:lstStyle/>
+          <a:p>
+            <a:pPr indent="0" marL="0">
+              <a:buNone/>
+            </a:pPr>
+            <a:endParaRPr lang="en-US" dirty="0"/>
+          </a:p>
+        </p:txBody>
+      </p:sp>
+      <p:sp>
+        <p:nvSpPr>
+          <p:cNvPr id="5" name="Shape 3"/>
+          <p:cNvSpPr/>
+          <p:nvPr/>
+        </p:nvSpPr>
+        <p:spPr>
+          <a:xfrm>
+            <a:off x="434876" y="883593"/>
+            <a:ext cx="0" cy="2764631"/>
+          </a:xfrm>
+          <a:prstGeom prst="line">
+            <a:avLst/>
+          </a:prstGeom>
+          <a:noFill/>
+          <a:ln w="57150">
+            <a:solidFill>
+              <a:srgbClr val="FE4447"/>
+            </a:solidFill>
+            <a:prstDash val="solid"/>
+          </a:ln>
+        </p:spPr>
+      </p:sp>
+      <p:sp>
+        <p:nvSpPr>
+          <p:cNvPr id="6" name="Text 4"/>
+          <p:cNvSpPr/>
+          <p:nvPr/>
+        </p:nvSpPr>
+        <p:spPr>
+          <a:xfrm>
+            <a:off x="692051" y="1074093"/>
+            <a:ext cx="7973389" cy="230981"/>
           </a:xfrm>
           <a:prstGeom prst="rect">
             <a:avLst/>
@@ -2662,138 +2923,466 @@
           <a:bodyPr wrap="square" lIns="0" tIns="0" rIns="0" bIns="0" rtlCol="0" anchor="t"/>
           <a:lstStyle/>
           <a:p>
-            <a:pPr algn="l" marL="342900" indent="-342900">
-              <a:lnSpc>
-                <a:spcPts val="1620"/>
-              </a:lnSpc>
-              <a:spcAft>
-                <a:spcPts val="300"/>
-              </a:spcAft>
-              <a:buSzPct val="100000"/>
-              <a:buChar char="•"/>
-            </a:pPr>
-            <a:r>
-              <a:rPr lang="en-US" sz="1200" b="1" dirty="0">
-                <a:solidFill>
-                  <a:srgbClr val="1C2833"/>
-                </a:solidFill>
-                <a:latin typeface="Arial" pitchFamily="34" charset="0"/>
-                <a:ea typeface="Arial" pitchFamily="34" charset="-122"/>
-                <a:cs typeface="Arial" pitchFamily="34" charset="-120"/>
-              </a:rPr>
-              <a:t>Tier up:</a:t>
-            </a:r>
             <a:pPr algn="l" indent="0" marL="0">
               <a:lnSpc>
-                <a:spcPts val="1620"/>
-              </a:lnSpc>
-              <a:spcAft>
-                <a:spcPts val="300"/>
-              </a:spcAft>
-              <a:buNone/>
-            </a:pPr>
-            <a:r>
-              <a:rPr lang="en-US" sz="1200" dirty="0">
-                <a:solidFill>
-                  <a:srgbClr val="1C2833"/>
-                </a:solidFill>
-                <a:latin typeface="Arial" pitchFamily="34" charset="0"/>
-                <a:ea typeface="Arial" pitchFamily="34" charset="-122"/>
-                <a:cs typeface="Arial" pitchFamily="34" charset="-120"/>
-              </a:rPr>
-              <a:t> If you got 60%+ speedup, your project should challenge you. Pick the speed-test data project — it requires statistical thinking.</a:t>
-            </a:r>
-            <a:endParaRPr lang="en-US" sz="1200" dirty="0"/>
-          </a:p>
-          <a:p>
-            <a:pPr algn="l" marL="342900" indent="-342900">
-              <a:lnSpc>
-                <a:spcPts val="1620"/>
-              </a:lnSpc>
-              <a:spcAft>
-                <a:spcPts val="300"/>
-              </a:spcAft>
-              <a:buSzPct val="100000"/>
-              <a:buChar char="•"/>
-            </a:pPr>
-            <a:r>
-              <a:rPr lang="en-US" sz="1200" b="1" dirty="0">
-                <a:solidFill>
-                  <a:srgbClr val="1C2833"/>
-                </a:solidFill>
-                <a:latin typeface="Arial" pitchFamily="34" charset="0"/>
-                <a:ea typeface="Arial" pitchFamily="34" charset="-122"/>
-                <a:cs typeface="Arial" pitchFamily="34" charset="-120"/>
-              </a:rPr>
-              <a:t>Tier down:</a:t>
-            </a:r>
+                <a:spcPts val="1820"/>
+              </a:lnSpc>
+              <a:spcBef>
+                <a:spcPts val="300"/>
+              </a:spcBef>
+              <a:spcAft>
+                <a:spcPts val="300"/>
+              </a:spcAft>
+              <a:buNone/>
+            </a:pPr>
+            <a:r>
+              <a:rPr lang="en-US" sz="1300" b="1" i="1" dirty="0">
+                <a:solidFill>
+                  <a:srgbClr val="1C2833"/>
+                </a:solidFill>
+                <a:latin typeface="Georgia" pitchFamily="34" charset="0"/>
+                <a:ea typeface="Georgia" pitchFamily="34" charset="-122"/>
+                <a:cs typeface="Georgia" pitchFamily="34" charset="-120"/>
+              </a:rPr>
+              <a:t>The retest</a:t>
+            </a:r>
+            <a:endParaRPr lang="en-US" sz="1300" dirty="0"/>
+          </a:p>
+        </p:txBody>
+      </p:sp>
+      <p:sp>
+        <p:nvSpPr>
+          <p:cNvPr id="7" name="Text 5"/>
+          <p:cNvSpPr/>
+          <p:nvPr/>
+        </p:nvSpPr>
+        <p:spPr>
+          <a:xfrm>
+            <a:off x="692051" y="1343174"/>
+            <a:ext cx="7973389" cy="230981"/>
+          </a:xfrm>
+          <a:prstGeom prst="rect">
+            <a:avLst/>
+          </a:prstGeom>
+          <a:noFill/>
+          <a:ln/>
+        </p:spPr>
+        <p:txBody>
+          <a:bodyPr wrap="square" lIns="0" tIns="0" rIns="0" bIns="0" rtlCol="0" anchor="t"/>
+          <a:lstStyle/>
+          <a:p>
             <a:pPr algn="l" indent="0" marL="0">
               <a:lnSpc>
-                <a:spcPts val="1620"/>
-              </a:lnSpc>
-              <a:spcAft>
-                <a:spcPts val="300"/>
-              </a:spcAft>
-              <a:buNone/>
-            </a:pPr>
-            <a:r>
-              <a:rPr lang="en-US" sz="1200" dirty="0">
-                <a:solidFill>
-                  <a:srgbClr val="1C2833"/>
-                </a:solidFill>
-                <a:latin typeface="Arial" pitchFamily="34" charset="0"/>
-                <a:ea typeface="Arial" pitchFamily="34" charset="-122"/>
-                <a:cs typeface="Arial" pitchFamily="34" charset="-120"/>
-              </a:rPr>
-              <a:t> Pick the teaching video — the act of </a:t>
-            </a:r>
+                <a:spcPts val="1820"/>
+              </a:lnSpc>
+              <a:spcBef>
+                <a:spcPts val="300"/>
+              </a:spcBef>
+              <a:spcAft>
+                <a:spcPts val="300"/>
+              </a:spcAft>
+              <a:buNone/>
+            </a:pPr>
+            <a:r>
+              <a:rPr lang="en-US" sz="1300" i="1" dirty="0">
+                <a:solidFill>
+                  <a:srgbClr val="1C2833"/>
+                </a:solidFill>
+                <a:latin typeface="Georgia" pitchFamily="34" charset="0"/>
+                <a:ea typeface="Georgia" pitchFamily="34" charset="-122"/>
+                <a:cs typeface="Georgia" pitchFamily="34" charset="-120"/>
+              </a:rPr>
+              <a:t>Same problem as Day 1: 5728 + 3417 + 6892 + 4536 = ?</a:t>
+            </a:r>
+            <a:endParaRPr lang="en-US" sz="1300" dirty="0"/>
+          </a:p>
+        </p:txBody>
+      </p:sp>
+      <p:sp>
+        <p:nvSpPr>
+          <p:cNvPr id="8" name="Text 6"/>
+          <p:cNvSpPr/>
+          <p:nvPr/>
+        </p:nvSpPr>
+        <p:spPr>
+          <a:xfrm>
+            <a:off x="692051" y="1612255"/>
+            <a:ext cx="7973389" cy="230981"/>
+          </a:xfrm>
+          <a:prstGeom prst="rect">
+            <a:avLst/>
+          </a:prstGeom>
+          <a:noFill/>
+          <a:ln/>
+        </p:spPr>
+        <p:txBody>
+          <a:bodyPr wrap="square" lIns="0" tIns="0" rIns="0" bIns="0" rtlCol="0" anchor="t"/>
+          <a:lstStyle/>
+          <a:p>
             <a:pPr algn="l" indent="0" marL="0">
               <a:lnSpc>
-                <a:spcPts val="1620"/>
-              </a:lnSpc>
-              <a:spcAft>
-                <a:spcPts val="300"/>
-              </a:spcAft>
-              <a:buNone/>
-            </a:pPr>
-            <a:r>
-              <a:rPr lang="en-US" sz="1200" i="1" dirty="0">
-                <a:solidFill>
-                  <a:srgbClr val="1C2833"/>
-                </a:solidFill>
-                <a:latin typeface="Arial" pitchFamily="34" charset="0"/>
-                <a:ea typeface="Arial" pitchFamily="34" charset="-122"/>
-                <a:cs typeface="Arial" pitchFamily="34" charset="-120"/>
-              </a:rPr>
-              <a:t>teaching</a:t>
+                <a:spcPts val="1820"/>
+              </a:lnSpc>
+              <a:spcBef>
+                <a:spcPts val="300"/>
+              </a:spcBef>
+              <a:spcAft>
+                <a:spcPts val="300"/>
+              </a:spcAft>
+              <a:buNone/>
+            </a:pPr>
+            <a:r>
+              <a:rPr lang="en-US" sz="1300" dirty="0">
+                <a:solidFill>
+                  <a:srgbClr val="1C2833"/>
+                </a:solidFill>
+                <a:latin typeface="Georgia" pitchFamily="34" charset="0"/>
+                <a:ea typeface="Georgia" pitchFamily="34" charset="-122"/>
+                <a:cs typeface="Georgia" pitchFamily="34" charset="-120"/>
+              </a:rPr>
+              <a:t>Day 1 time (baseline): ____ sec Day 5 time (dot method): ____ sec </a:t>
             </a:r>
             <a:pPr algn="l" indent="0" marL="0">
               <a:lnSpc>
-                <a:spcPts val="1620"/>
-              </a:lnSpc>
-              <a:spcAft>
-                <a:spcPts val="300"/>
-              </a:spcAft>
-              <a:buNone/>
-            </a:pPr>
-            <a:r>
-              <a:rPr lang="en-US" sz="1200" dirty="0">
-                <a:solidFill>
-                  <a:srgbClr val="1C2833"/>
-                </a:solidFill>
-                <a:latin typeface="Arial" pitchFamily="34" charset="0"/>
-                <a:ea typeface="Arial" pitchFamily="34" charset="-122"/>
-                <a:cs typeface="Arial" pitchFamily="34" charset="-120"/>
-              </a:rPr>
-              <a:t> the method reinforces it for you.</a:t>
-            </a:r>
-            <a:endParaRPr lang="en-US" sz="1200" dirty="0"/>
-          </a:p>
-        </p:txBody>
-      </p:sp>
-      <p:sp>
-        <p:nvSpPr>
-          <p:cNvPr id="5" name="Text 3"/>
+                <a:spcPts val="1820"/>
+              </a:lnSpc>
+              <a:spcBef>
+                <a:spcPts val="300"/>
+              </a:spcBef>
+              <a:spcAft>
+                <a:spcPts val="300"/>
+              </a:spcAft>
+              <a:buNone/>
+            </a:pPr>
+            <a:r>
+              <a:rPr lang="en-US" sz="1300" b="1" i="1" dirty="0">
+                <a:solidFill>
+                  <a:srgbClr val="1C2833"/>
+                </a:solidFill>
+                <a:latin typeface="Georgia" pitchFamily="34" charset="0"/>
+                <a:ea typeface="Georgia" pitchFamily="34" charset="-122"/>
+                <a:cs typeface="Georgia" pitchFamily="34" charset="-120"/>
+              </a:rPr>
+              <a:t>% change:</a:t>
+            </a:r>
+            <a:pPr algn="l" indent="0" marL="0">
+              <a:lnSpc>
+                <a:spcPts val="1820"/>
+              </a:lnSpc>
+              <a:spcBef>
+                <a:spcPts val="300"/>
+              </a:spcBef>
+              <a:spcAft>
+                <a:spcPts val="300"/>
+              </a:spcAft>
+              <a:buNone/>
+            </a:pPr>
+            <a:r>
+              <a:rPr lang="en-US" sz="1300" dirty="0">
+                <a:solidFill>
+                  <a:srgbClr val="1C2833"/>
+                </a:solidFill>
+                <a:latin typeface="Georgia" pitchFamily="34" charset="0"/>
+                <a:ea typeface="Georgia" pitchFamily="34" charset="-122"/>
+                <a:cs typeface="Georgia" pitchFamily="34" charset="-120"/>
+              </a:rPr>
+              <a:t> ___________</a:t>
+            </a:r>
+            <a:endParaRPr lang="en-US" sz="1300" dirty="0"/>
+          </a:p>
+        </p:txBody>
+      </p:sp>
+      <p:sp>
+        <p:nvSpPr>
+          <p:cNvPr id="9" name="Text 7"/>
+          <p:cNvSpPr/>
+          <p:nvPr/>
+        </p:nvSpPr>
+        <p:spPr>
+          <a:xfrm>
+            <a:off x="692051" y="1881336"/>
+            <a:ext cx="7973389" cy="230981"/>
+          </a:xfrm>
+          <a:prstGeom prst="rect">
+            <a:avLst/>
+          </a:prstGeom>
+          <a:noFill/>
+          <a:ln/>
+        </p:spPr>
+        <p:txBody>
+          <a:bodyPr wrap="square" lIns="0" tIns="0" rIns="0" bIns="0" rtlCol="0" anchor="t"/>
+          <a:lstStyle/>
+          <a:p>
+            <a:pPr algn="l" indent="0" marL="0">
+              <a:lnSpc>
+                <a:spcPts val="1820"/>
+              </a:lnSpc>
+              <a:spcBef>
+                <a:spcPts val="300"/>
+              </a:spcBef>
+              <a:spcAft>
+                <a:spcPts val="300"/>
+              </a:spcAft>
+              <a:buNone/>
+            </a:pPr>
+            <a:r>
+              <a:rPr lang="en-US" sz="1300" b="1" i="1" dirty="0">
+                <a:solidFill>
+                  <a:srgbClr val="1C2833"/>
+                </a:solidFill>
+                <a:latin typeface="Georgia" pitchFamily="34" charset="0"/>
+                <a:ea typeface="Georgia" pitchFamily="34" charset="-122"/>
+                <a:cs typeface="Georgia" pitchFamily="34" charset="-120"/>
+              </a:rPr>
+              <a:t>Project choice (decide today):</a:t>
+            </a:r>
+            <a:endParaRPr lang="en-US" sz="1300" dirty="0"/>
+          </a:p>
+        </p:txBody>
+      </p:sp>
+      <p:sp>
+        <p:nvSpPr>
+          <p:cNvPr id="10" name="Text 8"/>
+          <p:cNvSpPr/>
+          <p:nvPr/>
+        </p:nvSpPr>
+        <p:spPr>
+          <a:xfrm>
+            <a:off x="692051" y="2150418"/>
+            <a:ext cx="7973389" cy="230981"/>
+          </a:xfrm>
+          <a:prstGeom prst="rect">
+            <a:avLst/>
+          </a:prstGeom>
+          <a:noFill/>
+          <a:ln/>
+        </p:spPr>
+        <p:txBody>
+          <a:bodyPr wrap="square" lIns="0" tIns="0" rIns="0" bIns="0" rtlCol="0" anchor="t"/>
+          <a:lstStyle/>
+          <a:p>
+            <a:pPr algn="l" indent="0" marL="0">
+              <a:lnSpc>
+                <a:spcPts val="1820"/>
+              </a:lnSpc>
+              <a:spcBef>
+                <a:spcPts val="300"/>
+              </a:spcBef>
+              <a:spcAft>
+                <a:spcPts val="300"/>
+              </a:spcAft>
+              <a:buNone/>
+            </a:pPr>
+            <a:r>
+              <a:rPr lang="en-US" sz="1300" i="1" dirty="0">
+                <a:solidFill>
+                  <a:srgbClr val="1C2833"/>
+                </a:solidFill>
+                <a:latin typeface="Georgia" pitchFamily="34" charset="0"/>
+                <a:ea typeface="Georgia" pitchFamily="34" charset="-122"/>
+                <a:cs typeface="Georgia" pitchFamily="34" charset="-120"/>
+              </a:rPr>
+              <a:t>60-second teaching video</a:t>
+            </a:r>
+            <a:endParaRPr lang="en-US" sz="1300" dirty="0"/>
+          </a:p>
+        </p:txBody>
+      </p:sp>
+      <p:sp>
+        <p:nvSpPr>
+          <p:cNvPr id="11" name="Text 9"/>
+          <p:cNvSpPr/>
+          <p:nvPr/>
+        </p:nvSpPr>
+        <p:spPr>
+          <a:xfrm>
+            <a:off x="692051" y="2419499"/>
+            <a:ext cx="7973389" cy="230981"/>
+          </a:xfrm>
+          <a:prstGeom prst="rect">
+            <a:avLst/>
+          </a:prstGeom>
+          <a:noFill/>
+          <a:ln/>
+        </p:spPr>
+        <p:txBody>
+          <a:bodyPr wrap="square" lIns="0" tIns="0" rIns="0" bIns="0" rtlCol="0" anchor="t"/>
+          <a:lstStyle/>
+          <a:p>
+            <a:pPr algn="l" indent="0" marL="0">
+              <a:lnSpc>
+                <a:spcPts val="1820"/>
+              </a:lnSpc>
+              <a:spcBef>
+                <a:spcPts val="300"/>
+              </a:spcBef>
+              <a:spcAft>
+                <a:spcPts val="300"/>
+              </a:spcAft>
+              <a:buNone/>
+            </a:pPr>
+            <a:r>
+              <a:rPr lang="en-US" sz="1300" i="1" dirty="0">
+                <a:solidFill>
+                  <a:srgbClr val="1C2833"/>
+                </a:solidFill>
+                <a:latin typeface="Georgia" pitchFamily="34" charset="0"/>
+                <a:ea typeface="Georgia" pitchFamily="34" charset="-122"/>
+                <a:cs typeface="Georgia" pitchFamily="34" charset="-120"/>
+              </a:rPr>
+              <a:t>Printed workbook (20 worked problems)</a:t>
+            </a:r>
+            <a:endParaRPr lang="en-US" sz="1300" dirty="0"/>
+          </a:p>
+        </p:txBody>
+      </p:sp>
+      <p:sp>
+        <p:nvSpPr>
+          <p:cNvPr id="12" name="Text 10"/>
+          <p:cNvSpPr/>
+          <p:nvPr/>
+        </p:nvSpPr>
+        <p:spPr>
+          <a:xfrm>
+            <a:off x="692051" y="2688580"/>
+            <a:ext cx="7973389" cy="230981"/>
+          </a:xfrm>
+          <a:prstGeom prst="rect">
+            <a:avLst/>
+          </a:prstGeom>
+          <a:noFill/>
+          <a:ln/>
+        </p:spPr>
+        <p:txBody>
+          <a:bodyPr wrap="square" lIns="0" tIns="0" rIns="0" bIns="0" rtlCol="0" anchor="t"/>
+          <a:lstStyle/>
+          <a:p>
+            <a:pPr algn="l" indent="0" marL="0">
+              <a:lnSpc>
+                <a:spcPts val="1820"/>
+              </a:lnSpc>
+              <a:spcBef>
+                <a:spcPts val="300"/>
+              </a:spcBef>
+              <a:spcAft>
+                <a:spcPts val="300"/>
+              </a:spcAft>
+              <a:buNone/>
+            </a:pPr>
+            <a:r>
+              <a:rPr lang="en-US" sz="1300" i="1" dirty="0">
+                <a:solidFill>
+                  <a:srgbClr val="1C2833"/>
+                </a:solidFill>
+                <a:latin typeface="Georgia" pitchFamily="34" charset="0"/>
+                <a:ea typeface="Georgia" pitchFamily="34" charset="-122"/>
+                <a:cs typeface="Georgia" pitchFamily="34" charset="-120"/>
+              </a:rPr>
+              <a:t>Comparative speed-test data project</a:t>
+            </a:r>
+            <a:endParaRPr lang="en-US" sz="1300" dirty="0"/>
+          </a:p>
+        </p:txBody>
+      </p:sp>
+      <p:sp>
+        <p:nvSpPr>
+          <p:cNvPr id="13" name="Text 11"/>
+          <p:cNvSpPr/>
+          <p:nvPr/>
+        </p:nvSpPr>
+        <p:spPr>
+          <a:xfrm>
+            <a:off x="692051" y="2957661"/>
+            <a:ext cx="7973389" cy="230981"/>
+          </a:xfrm>
+          <a:prstGeom prst="rect">
+            <a:avLst/>
+          </a:prstGeom>
+          <a:noFill/>
+          <a:ln/>
+        </p:spPr>
+        <p:txBody>
+          <a:bodyPr wrap="square" lIns="0" tIns="0" rIns="0" bIns="0" rtlCol="0" anchor="t"/>
+          <a:lstStyle/>
+          <a:p>
+            <a:pPr algn="l" indent="0" marL="0">
+              <a:lnSpc>
+                <a:spcPts val="1820"/>
+              </a:lnSpc>
+              <a:spcBef>
+                <a:spcPts val="300"/>
+              </a:spcBef>
+              <a:spcAft>
+                <a:spcPts val="300"/>
+              </a:spcAft>
+              <a:buNone/>
+            </a:pPr>
+            <a:r>
+              <a:rPr lang="en-US" sz="1300" i="1" dirty="0">
+                <a:solidFill>
+                  <a:srgbClr val="1C2833"/>
+                </a:solidFill>
+                <a:latin typeface="Georgia" pitchFamily="34" charset="0"/>
+                <a:ea typeface="Georgia" pitchFamily="34" charset="-122"/>
+                <a:cs typeface="Georgia" pitchFamily="34" charset="-120"/>
+              </a:rPr>
+              <a:t>Partner: ____________________   Format: ____________________</a:t>
+            </a:r>
+            <a:endParaRPr lang="en-US" sz="1300" dirty="0"/>
+          </a:p>
+        </p:txBody>
+      </p:sp>
+      <p:sp>
+        <p:nvSpPr>
+          <p:cNvPr id="14" name="Text 12"/>
+          <p:cNvSpPr/>
+          <p:nvPr/>
+        </p:nvSpPr>
+        <p:spPr>
+          <a:xfrm>
+            <a:off x="692051" y="3226743"/>
+            <a:ext cx="7973389" cy="230981"/>
+          </a:xfrm>
+          <a:prstGeom prst="rect">
+            <a:avLst/>
+          </a:prstGeom>
+          <a:noFill/>
+          <a:ln/>
+        </p:spPr>
+        <p:txBody>
+          <a:bodyPr wrap="square" lIns="0" tIns="0" rIns="0" bIns="0" rtlCol="0" anchor="t"/>
+          <a:lstStyle/>
+          <a:p>
+            <a:pPr algn="l" indent="0" marL="0">
+              <a:lnSpc>
+                <a:spcPts val="1820"/>
+              </a:lnSpc>
+              <a:spcBef>
+                <a:spcPts val="300"/>
+              </a:spcBef>
+              <a:spcAft>
+                <a:spcPts val="300"/>
+              </a:spcAft>
+              <a:buNone/>
+            </a:pPr>
+            <a:r>
+              <a:rPr lang="en-US" sz="1300" i="1" dirty="0">
+                <a:solidFill>
+                  <a:srgbClr val="1C2833"/>
+                </a:solidFill>
+                <a:latin typeface="Georgia" pitchFamily="34" charset="0"/>
+                <a:ea typeface="Georgia" pitchFamily="34" charset="-122"/>
+                <a:cs typeface="Georgia" pitchFamily="34" charset="-120"/>
+              </a:rPr>
+              <a:t>One sentence: what we'll do — ____________________________________________________</a:t>
+            </a:r>
+            <a:endParaRPr lang="en-US" sz="1300" dirty="0"/>
+          </a:p>
+        </p:txBody>
+      </p:sp>
+      <p:sp>
+        <p:nvSpPr>
+          <p:cNvPr id="15" name="Text 13"/>
           <p:cNvSpPr/>
           <p:nvPr/>
         </p:nvSpPr>
@@ -2943,7 +3532,7 @@
                 <a:ea typeface="Georgia" pitchFamily="34" charset="-122"/>
                 <a:cs typeface="Georgia" pitchFamily="34" charset="-120"/>
               </a:rPr>
-              <a:t>Teacher notes</a:t>
+              <a:t>Homework</a:t>
             </a:r>
             <a:endParaRPr lang="en-US" sz="1800" dirty="0"/>
           </a:p>
@@ -2957,8 +3546,8 @@
         </p:nvSpPr>
         <p:spPr>
           <a:xfrm>
-            <a:off x="406301" y="870942"/>
-            <a:ext cx="8498026" cy="639812"/>
+            <a:off x="634901" y="883593"/>
+            <a:ext cx="8102798" cy="525661"/>
           </a:xfrm>
           <a:prstGeom prst="rect">
             <a:avLst/>
@@ -2970,17 +3559,15 @@
           <a:bodyPr wrap="square" lIns="0" tIns="0" rIns="0" bIns="0" rtlCol="0" anchor="t"/>
           <a:lstStyle/>
           <a:p>
-            <a:pPr algn="l" indent="0" marL="0">
-              <a:lnSpc>
-                <a:spcPts val="1680"/>
-              </a:lnSpc>
-              <a:spcBef>
-                <a:spcPts val="300"/>
-              </a:spcBef>
-              <a:spcAft>
-                <a:spcPts val="300"/>
-              </a:spcAft>
-              <a:buNone/>
+            <a:pPr algn="l" marL="342900" indent="-342900">
+              <a:lnSpc>
+                <a:spcPts val="1620"/>
+              </a:lnSpc>
+              <a:spcAft>
+                <a:spcPts val="300"/>
+              </a:spcAft>
+              <a:buSzPct val="100000"/>
+              <a:buChar char="•"/>
             </a:pPr>
             <a:r>
               <a:rPr lang="en-US" sz="1200" dirty="0">
@@ -2991,7 +3578,31 @@
                 <a:ea typeface="Arial" pitchFamily="34" charset="-122"/>
                 <a:cs typeface="Arial" pitchFamily="34" charset="-120"/>
               </a:rPr>
-              <a:t>– Be honest with students whose times slowed: the method has a learning curve, and steady drill (Day 7's mental patterns will help) will catch them up. – Mark the formative quiz tonight. – Speed-test data projects need ethics: pairs should ask permission before timing family members.</a:t>
+              <a:t>Submit project plan paragraph (one paragraph, 4–6 sentences) by tomorrow morning.</a:t>
+            </a:r>
+            <a:endParaRPr lang="en-US" sz="1200" dirty="0"/>
+          </a:p>
+          <a:p>
+            <a:pPr algn="l" marL="342900" indent="-342900">
+              <a:lnSpc>
+                <a:spcPts val="1620"/>
+              </a:lnSpc>
+              <a:spcAft>
+                <a:spcPts val="300"/>
+              </a:spcAft>
+              <a:buSzPct val="100000"/>
+              <a:buChar char="•"/>
+            </a:pPr>
+            <a:r>
+              <a:rPr lang="en-US" sz="1200" dirty="0">
+                <a:solidFill>
+                  <a:srgbClr val="1C2833"/>
+                </a:solidFill>
+                <a:latin typeface="Arial" pitchFamily="34" charset="0"/>
+                <a:ea typeface="Arial" pitchFamily="34" charset="-122"/>
+                <a:cs typeface="Arial" pitchFamily="34" charset="-120"/>
+              </a:rPr>
+              <a:t>Begin gathering materials.</a:t>
             </a:r>
             <a:endParaRPr lang="en-US" sz="1200" dirty="0"/>
           </a:p>
@@ -3149,7 +3760,7 @@
                 <a:ea typeface="Georgia" pitchFamily="34" charset="-122"/>
                 <a:cs typeface="Georgia" pitchFamily="34" charset="-120"/>
               </a:rPr>
-              <a:t>Citation(s) used in this lesson</a:t>
+              <a:t>Differentiation</a:t>
             </a:r>
             <a:endParaRPr lang="en-US" sz="1800" dirty="0"/>
           </a:p>
@@ -3163,8 +3774,8 @@
         </p:nvSpPr>
         <p:spPr>
           <a:xfrm>
-            <a:off x="406301" y="870942"/>
-            <a:ext cx="8498026" cy="222796"/>
+            <a:off x="634901" y="883593"/>
+            <a:ext cx="8102798" cy="731341"/>
           </a:xfrm>
           <a:prstGeom prst="rect">
             <a:avLst/>
@@ -3176,8 +3787,158 @@
           <a:bodyPr wrap="square" lIns="0" tIns="0" rIns="0" bIns="0" rtlCol="0" anchor="t"/>
           <a:lstStyle/>
           <a:p>
+            <a:pPr algn="l" marL="342900" indent="-342900">
+              <a:lnSpc>
+                <a:spcPts val="1620"/>
+              </a:lnSpc>
+              <a:spcAft>
+                <a:spcPts val="300"/>
+              </a:spcAft>
+              <a:buSzPct val="100000"/>
+              <a:buChar char="•"/>
+            </a:pPr>
+            <a:r>
+              <a:rPr lang="en-US" sz="1200" b="1" dirty="0">
+                <a:solidFill>
+                  <a:srgbClr val="1C2833"/>
+                </a:solidFill>
+                <a:latin typeface="Arial" pitchFamily="34" charset="0"/>
+                <a:ea typeface="Arial" pitchFamily="34" charset="-122"/>
+                <a:cs typeface="Arial" pitchFamily="34" charset="-120"/>
+              </a:rPr>
+              <a:t>Tier up:</a:t>
+            </a:r>
             <a:pPr algn="l" indent="0" marL="0">
               <a:lnSpc>
+                <a:spcPts val="1620"/>
+              </a:lnSpc>
+              <a:spcAft>
+                <a:spcPts val="300"/>
+              </a:spcAft>
+              <a:buNone/>
+            </a:pPr>
+            <a:r>
+              <a:rPr lang="en-US" sz="1200" dirty="0">
+                <a:solidFill>
+                  <a:srgbClr val="1C2833"/>
+                </a:solidFill>
+                <a:latin typeface="Arial" pitchFamily="34" charset="0"/>
+                <a:ea typeface="Arial" pitchFamily="34" charset="-122"/>
+                <a:cs typeface="Arial" pitchFamily="34" charset="-120"/>
+              </a:rPr>
+              <a:t> If you got 60%+ speedup, your project should challenge you. Pick the speed-test data project — it requires statistical thinking.</a:t>
+            </a:r>
+            <a:endParaRPr lang="en-US" sz="1200" dirty="0"/>
+          </a:p>
+          <a:p>
+            <a:pPr algn="l" marL="342900" indent="-342900">
+              <a:lnSpc>
+                <a:spcPts val="1620"/>
+              </a:lnSpc>
+              <a:spcAft>
+                <a:spcPts val="300"/>
+              </a:spcAft>
+              <a:buSzPct val="100000"/>
+              <a:buChar char="•"/>
+            </a:pPr>
+            <a:r>
+              <a:rPr lang="en-US" sz="1200" b="1" dirty="0">
+                <a:solidFill>
+                  <a:srgbClr val="1C2833"/>
+                </a:solidFill>
+                <a:latin typeface="Arial" pitchFamily="34" charset="0"/>
+                <a:ea typeface="Arial" pitchFamily="34" charset="-122"/>
+                <a:cs typeface="Arial" pitchFamily="34" charset="-120"/>
+              </a:rPr>
+              <a:t>Tier down:</a:t>
+            </a:r>
+            <a:pPr algn="l" indent="0" marL="0">
+              <a:lnSpc>
+                <a:spcPts val="1620"/>
+              </a:lnSpc>
+              <a:spcAft>
+                <a:spcPts val="300"/>
+              </a:spcAft>
+              <a:buNone/>
+            </a:pPr>
+            <a:r>
+              <a:rPr lang="en-US" sz="1200" dirty="0">
+                <a:solidFill>
+                  <a:srgbClr val="1C2833"/>
+                </a:solidFill>
+                <a:latin typeface="Arial" pitchFamily="34" charset="0"/>
+                <a:ea typeface="Arial" pitchFamily="34" charset="-122"/>
+                <a:cs typeface="Arial" pitchFamily="34" charset="-120"/>
+              </a:rPr>
+              <a:t> Pick the teaching video — the act of </a:t>
+            </a:r>
+            <a:pPr algn="l" indent="0" marL="0">
+              <a:lnSpc>
+                <a:spcPts val="1620"/>
+              </a:lnSpc>
+              <a:spcAft>
+                <a:spcPts val="300"/>
+              </a:spcAft>
+              <a:buNone/>
+            </a:pPr>
+            <a:r>
+              <a:rPr lang="en-US" sz="1200" i="1" dirty="0">
+                <a:solidFill>
+                  <a:srgbClr val="1C2833"/>
+                </a:solidFill>
+                <a:latin typeface="Arial" pitchFamily="34" charset="0"/>
+                <a:ea typeface="Arial" pitchFamily="34" charset="-122"/>
+                <a:cs typeface="Arial" pitchFamily="34" charset="-120"/>
+              </a:rPr>
+              <a:t>teaching</a:t>
+            </a:r>
+            <a:pPr algn="l" indent="0" marL="0">
+              <a:lnSpc>
+                <a:spcPts val="1620"/>
+              </a:lnSpc>
+              <a:spcAft>
+                <a:spcPts val="300"/>
+              </a:spcAft>
+              <a:buNone/>
+            </a:pPr>
+            <a:r>
+              <a:rPr lang="en-US" sz="1200" dirty="0">
+                <a:solidFill>
+                  <a:srgbClr val="1C2833"/>
+                </a:solidFill>
+                <a:latin typeface="Arial" pitchFamily="34" charset="0"/>
+                <a:ea typeface="Arial" pitchFamily="34" charset="-122"/>
+                <a:cs typeface="Arial" pitchFamily="34" charset="-120"/>
+              </a:rPr>
+              <a:t> the method reinforces it for you.</a:t>
+            </a:r>
+            <a:endParaRPr lang="en-US" sz="1200" dirty="0"/>
+          </a:p>
+        </p:txBody>
+      </p:sp>
+      <p:sp>
+        <p:nvSpPr>
+          <p:cNvPr id="5" name="Text 3"/>
+          <p:cNvSpPr/>
+          <p:nvPr/>
+        </p:nvSpPr>
+        <p:spPr>
+          <a:xfrm>
+            <a:off x="406301" y="4434929"/>
+            <a:ext cx="8498026" cy="213271"/>
+          </a:xfrm>
+          <a:prstGeom prst="rect">
+            <a:avLst/>
+          </a:prstGeom>
+          <a:noFill/>
+          <a:ln/>
+        </p:spPr>
+        <p:txBody>
+          <a:bodyPr wrap="square" lIns="0" tIns="0" rIns="0" bIns="0" rtlCol="0" anchor="t"/>
+          <a:lstStyle/>
+          <a:p>
+            <a:pPr algn="l" indent="0" marL="0">
+              <a:lnSpc>
                 <a:spcPts val="1680"/>
               </a:lnSpc>
               <a:spcBef>
@@ -3197,10 +3958,239 @@
                 <a:ea typeface="Arial" pitchFamily="34" charset="-122"/>
                 <a:cs typeface="Arial" pitchFamily="34" charset="-120"/>
               </a:rPr>
-              <a:t>– Source comparison: see </a:t>
-            </a:r>
+              <a:t>Middle ·  · IKS Curriculum</a:t>
+            </a:r>
+            <a:endParaRPr lang="en-US" sz="1200" dirty="0"/>
+          </a:p>
+        </p:txBody>
+      </p:sp>
+    </p:spTree>
+  </p:cSld>
+  <p:clrMapOvr>
+    <a:masterClrMapping/>
+  </p:clrMapOvr>
+</p:sld>
+</file>
+
+<file path=ppt/slides/slide14.xml><?xml version="1.0" encoding="utf-8"?>
+<p:sld xmlns:a="http://schemas.openxmlformats.org/drawingml/2006/main" xmlns:r="http://schemas.openxmlformats.org/officeDocument/2006/relationships" xmlns:p="http://schemas.openxmlformats.org/presentationml/2006/main">
+  <p:cSld name="Slide 14">
+    <p:bg>
+      <p:bgPr>
+        <a:solidFill>
+          <a:srgbClr val="FFFFFF"/>
+        </a:solidFill>
+      </p:bgPr>
+    </p:bg>
+    <p:spTree>
+      <p:nvGrpSpPr>
+        <p:cNvPr id="1" name=""/>
+        <p:cNvGrpSpPr/>
+        <p:nvPr/>
+      </p:nvGrpSpPr>
+      <p:grpSpPr>
+        <a:xfrm>
+          <a:off x="0" y="0"/>
+          <a:ext cx="0" cy="0"/>
+          <a:chOff x="0" y="0"/>
+          <a:chExt cx="0" cy="0"/>
+        </a:xfrm>
+      </p:grpSpPr>
+      <p:sp>
+        <p:nvSpPr>
+          <p:cNvPr id="2" name="Text 0"/>
+          <p:cNvSpPr/>
+          <p:nvPr/>
+        </p:nvSpPr>
+        <p:spPr>
+          <a:xfrm>
+            <a:off x="0" y="0"/>
+            <a:ext cx="9144000" cy="101501"/>
+          </a:xfrm>
+          <a:prstGeom prst="rect">
+            <a:avLst/>
+          </a:prstGeom>
+          <a:solidFill>
+            <a:srgbClr val="277884"/>
+          </a:solidFill>
+          <a:ln/>
+        </p:spPr>
+        <p:txBody>
+          <a:bodyPr wrap="square" rtlCol="0" anchor="ctr"/>
+          <a:lstStyle/>
+          <a:p>
+            <a:pPr indent="0" marL="0">
+              <a:buNone/>
+            </a:pPr>
+            <a:endParaRPr lang="en-US" dirty="0"/>
+          </a:p>
+        </p:txBody>
+      </p:sp>
+      <p:sp>
+        <p:nvSpPr>
+          <p:cNvPr id="3" name="Text 1"/>
+          <p:cNvSpPr/>
+          <p:nvPr/>
+        </p:nvSpPr>
+        <p:spPr>
+          <a:xfrm>
+            <a:off x="406301" y="457051"/>
+            <a:ext cx="8498026" cy="274290"/>
+          </a:xfrm>
+          <a:prstGeom prst="rect">
+            <a:avLst/>
+          </a:prstGeom>
+          <a:noFill/>
+          <a:ln/>
+        </p:spPr>
+        <p:txBody>
+          <a:bodyPr wrap="square" lIns="0" tIns="0" rIns="0" bIns="0" rtlCol="0" anchor="t"/>
+          <a:lstStyle/>
+          <a:p>
             <a:pPr algn="l" indent="0" marL="0">
               <a:lnSpc>
+                <a:spcPts val="2160"/>
+              </a:lnSpc>
+              <a:spcBef>
+                <a:spcPts val="600"/>
+              </a:spcBef>
+              <a:spcAft>
+                <a:spcPts val="800"/>
+              </a:spcAft>
+              <a:buNone/>
+            </a:pPr>
+            <a:r>
+              <a:rPr lang="en-US" sz="1800" b="1" dirty="0">
+                <a:solidFill>
+                  <a:srgbClr val="FE4447"/>
+                </a:solidFill>
+                <a:latin typeface="Georgia" pitchFamily="34" charset="0"/>
+                <a:ea typeface="Georgia" pitchFamily="34" charset="-122"/>
+                <a:cs typeface="Georgia" pitchFamily="34" charset="-120"/>
+              </a:rPr>
+              <a:t>Teacher notes</a:t>
+            </a:r>
+            <a:endParaRPr lang="en-US" sz="1800" dirty="0"/>
+          </a:p>
+        </p:txBody>
+      </p:sp>
+      <p:sp>
+        <p:nvSpPr>
+          <p:cNvPr id="4" name="Text 2"/>
+          <p:cNvSpPr/>
+          <p:nvPr/>
+        </p:nvSpPr>
+        <p:spPr>
+          <a:xfrm>
+            <a:off x="634901" y="883593"/>
+            <a:ext cx="8102798" cy="975122"/>
+          </a:xfrm>
+          <a:prstGeom prst="rect">
+            <a:avLst/>
+          </a:prstGeom>
+          <a:noFill/>
+          <a:ln/>
+        </p:spPr>
+        <p:txBody>
+          <a:bodyPr wrap="square" lIns="0" tIns="0" rIns="0" bIns="0" rtlCol="0" anchor="t"/>
+          <a:lstStyle/>
+          <a:p>
+            <a:pPr algn="l" marL="342900" indent="-342900">
+              <a:lnSpc>
+                <a:spcPts val="1620"/>
+              </a:lnSpc>
+              <a:spcAft>
+                <a:spcPts val="300"/>
+              </a:spcAft>
+              <a:buSzPct val="100000"/>
+              <a:buChar char="•"/>
+            </a:pPr>
+            <a:r>
+              <a:rPr lang="en-US" sz="1200" dirty="0">
+                <a:solidFill>
+                  <a:srgbClr val="1C2833"/>
+                </a:solidFill>
+                <a:latin typeface="Arial" pitchFamily="34" charset="0"/>
+                <a:ea typeface="Arial" pitchFamily="34" charset="-122"/>
+                <a:cs typeface="Arial" pitchFamily="34" charset="-120"/>
+              </a:rPr>
+              <a:t>Be honest with students whose times slowed: the method has a learning curve, and steady drill (Day 7's mental patterns will help) will catch them up.</a:t>
+            </a:r>
+            <a:endParaRPr lang="en-US" sz="1200" dirty="0"/>
+          </a:p>
+          <a:p>
+            <a:pPr algn="l" marL="342900" indent="-342900">
+              <a:lnSpc>
+                <a:spcPts val="1620"/>
+              </a:lnSpc>
+              <a:spcAft>
+                <a:spcPts val="300"/>
+              </a:spcAft>
+              <a:buSzPct val="100000"/>
+              <a:buChar char="•"/>
+            </a:pPr>
+            <a:r>
+              <a:rPr lang="en-US" sz="1200" dirty="0">
+                <a:solidFill>
+                  <a:srgbClr val="1C2833"/>
+                </a:solidFill>
+                <a:latin typeface="Arial" pitchFamily="34" charset="0"/>
+                <a:ea typeface="Arial" pitchFamily="34" charset="-122"/>
+                <a:cs typeface="Arial" pitchFamily="34" charset="-120"/>
+              </a:rPr>
+              <a:t>Mark the formative quiz tonight.</a:t>
+            </a:r>
+            <a:endParaRPr lang="en-US" sz="1200" dirty="0"/>
+          </a:p>
+          <a:p>
+            <a:pPr algn="l" marL="342900" indent="-342900">
+              <a:lnSpc>
+                <a:spcPts val="1620"/>
+              </a:lnSpc>
+              <a:spcAft>
+                <a:spcPts val="300"/>
+              </a:spcAft>
+              <a:buSzPct val="100000"/>
+              <a:buChar char="•"/>
+            </a:pPr>
+            <a:r>
+              <a:rPr lang="en-US" sz="1200" dirty="0">
+                <a:solidFill>
+                  <a:srgbClr val="1C2833"/>
+                </a:solidFill>
+                <a:latin typeface="Arial" pitchFamily="34" charset="0"/>
+                <a:ea typeface="Arial" pitchFamily="34" charset="-122"/>
+                <a:cs typeface="Arial" pitchFamily="34" charset="-120"/>
+              </a:rPr>
+              <a:t>Speed-test data projects need ethics: pairs should ask permission before timing family members.</a:t>
+            </a:r>
+            <a:endParaRPr lang="en-US" sz="1200" dirty="0"/>
+          </a:p>
+        </p:txBody>
+      </p:sp>
+      <p:sp>
+        <p:nvSpPr>
+          <p:cNvPr id="5" name="Text 3"/>
+          <p:cNvSpPr/>
+          <p:nvPr/>
+        </p:nvSpPr>
+        <p:spPr>
+          <a:xfrm>
+            <a:off x="406301" y="4434929"/>
+            <a:ext cx="8498026" cy="213271"/>
+          </a:xfrm>
+          <a:prstGeom prst="rect">
+            <a:avLst/>
+          </a:prstGeom>
+          <a:noFill/>
+          <a:ln/>
+        </p:spPr>
+        <p:txBody>
+          <a:bodyPr wrap="square" lIns="0" tIns="0" rIns="0" bIns="0" rtlCol="0" anchor="t"/>
+          <a:lstStyle/>
+          <a:p>
+            <a:pPr algn="l" indent="0" marL="0">
+              <a:lnSpc>
                 <a:spcPts val="1680"/>
               </a:lnSpc>
               <a:spcBef>
@@ -3220,15 +4210,188 @@
                 <a:ea typeface="Arial" pitchFamily="34" charset="-122"/>
                 <a:cs typeface="Arial" pitchFamily="34" charset="-120"/>
               </a:rPr>
+              <a:t>Middle ·  · IKS Curriculum</a:t>
+            </a:r>
+            <a:endParaRPr lang="en-US" sz="1200" dirty="0"/>
+          </a:p>
+        </p:txBody>
+      </p:sp>
+    </p:spTree>
+  </p:cSld>
+  <p:clrMapOvr>
+    <a:masterClrMapping/>
+  </p:clrMapOvr>
+</p:sld>
+</file>
+
+<file path=ppt/slides/slide15.xml><?xml version="1.0" encoding="utf-8"?>
+<p:sld xmlns:a="http://schemas.openxmlformats.org/drawingml/2006/main" xmlns:r="http://schemas.openxmlformats.org/officeDocument/2006/relationships" xmlns:p="http://schemas.openxmlformats.org/presentationml/2006/main">
+  <p:cSld name="Slide 15">
+    <p:bg>
+      <p:bgPr>
+        <a:solidFill>
+          <a:srgbClr val="FFFFFF"/>
+        </a:solidFill>
+      </p:bgPr>
+    </p:bg>
+    <p:spTree>
+      <p:nvGrpSpPr>
+        <p:cNvPr id="1" name=""/>
+        <p:cNvGrpSpPr/>
+        <p:nvPr/>
+      </p:nvGrpSpPr>
+      <p:grpSpPr>
+        <a:xfrm>
+          <a:off x="0" y="0"/>
+          <a:ext cx="0" cy="0"/>
+          <a:chOff x="0" y="0"/>
+          <a:chExt cx="0" cy="0"/>
+        </a:xfrm>
+      </p:grpSpPr>
+      <p:sp>
+        <p:nvSpPr>
+          <p:cNvPr id="2" name="Text 0"/>
+          <p:cNvSpPr/>
+          <p:nvPr/>
+        </p:nvSpPr>
+        <p:spPr>
+          <a:xfrm>
+            <a:off x="0" y="0"/>
+            <a:ext cx="9144000" cy="101501"/>
+          </a:xfrm>
+          <a:prstGeom prst="rect">
+            <a:avLst/>
+          </a:prstGeom>
+          <a:solidFill>
+            <a:srgbClr val="277884"/>
+          </a:solidFill>
+          <a:ln/>
+        </p:spPr>
+        <p:txBody>
+          <a:bodyPr wrap="square" rtlCol="0" anchor="ctr"/>
+          <a:lstStyle/>
+          <a:p>
+            <a:pPr indent="0" marL="0">
+              <a:buNone/>
+            </a:pPr>
+            <a:endParaRPr lang="en-US" dirty="0"/>
+          </a:p>
+        </p:txBody>
+      </p:sp>
+      <p:sp>
+        <p:nvSpPr>
+          <p:cNvPr id="3" name="Text 1"/>
+          <p:cNvSpPr/>
+          <p:nvPr/>
+        </p:nvSpPr>
+        <p:spPr>
+          <a:xfrm>
+            <a:off x="406301" y="457051"/>
+            <a:ext cx="8498026" cy="274290"/>
+          </a:xfrm>
+          <a:prstGeom prst="rect">
+            <a:avLst/>
+          </a:prstGeom>
+          <a:noFill/>
+          <a:ln/>
+        </p:spPr>
+        <p:txBody>
+          <a:bodyPr wrap="square" lIns="0" tIns="0" rIns="0" bIns="0" rtlCol="0" anchor="t"/>
+          <a:lstStyle/>
+          <a:p>
+            <a:pPr algn="l" indent="0" marL="0">
+              <a:lnSpc>
+                <a:spcPts val="2160"/>
+              </a:lnSpc>
+              <a:spcBef>
+                <a:spcPts val="600"/>
+              </a:spcBef>
+              <a:spcAft>
+                <a:spcPts val="800"/>
+              </a:spcAft>
+              <a:buNone/>
+            </a:pPr>
+            <a:r>
+              <a:rPr lang="en-US" sz="1800" b="1" dirty="0">
+                <a:solidFill>
+                  <a:srgbClr val="FE4447"/>
+                </a:solidFill>
+                <a:latin typeface="Georgia" pitchFamily="34" charset="0"/>
+                <a:ea typeface="Georgia" pitchFamily="34" charset="-122"/>
+                <a:cs typeface="Georgia" pitchFamily="34" charset="-120"/>
+              </a:rPr>
+              <a:t>Citation(s) used in this lesson</a:t>
+            </a:r>
+            <a:endParaRPr lang="en-US" sz="1800" dirty="0"/>
+          </a:p>
+        </p:txBody>
+      </p:sp>
+      <p:sp>
+        <p:nvSpPr>
+          <p:cNvPr id="4" name="Text 2"/>
+          <p:cNvSpPr/>
+          <p:nvPr/>
+        </p:nvSpPr>
+        <p:spPr>
+          <a:xfrm>
+            <a:off x="634901" y="883593"/>
+            <a:ext cx="8102798" cy="300930"/>
+          </a:xfrm>
+          <a:prstGeom prst="rect">
+            <a:avLst/>
+          </a:prstGeom>
+          <a:noFill/>
+          <a:ln/>
+        </p:spPr>
+        <p:txBody>
+          <a:bodyPr wrap="square" lIns="0" tIns="0" rIns="0" bIns="0" rtlCol="0" anchor="t"/>
+          <a:lstStyle/>
+          <a:p>
+            <a:pPr algn="l" marL="342900" indent="-342900">
+              <a:lnSpc>
+                <a:spcPts val="1620"/>
+              </a:lnSpc>
+              <a:spcAft>
+                <a:spcPts val="300"/>
+              </a:spcAft>
+              <a:buSzPct val="100000"/>
+              <a:buChar char="•"/>
+            </a:pPr>
+            <a:r>
+              <a:rPr lang="en-US" sz="1200" dirty="0">
+                <a:solidFill>
+                  <a:srgbClr val="1C2833"/>
+                </a:solidFill>
+                <a:latin typeface="Arial" pitchFamily="34" charset="0"/>
+                <a:ea typeface="Arial" pitchFamily="34" charset="-122"/>
+                <a:cs typeface="Arial" pitchFamily="34" charset="-120"/>
+              </a:rPr>
+              <a:t>Source comparison: see </a:t>
+            </a:r>
+            <a:pPr algn="l" indent="0" marL="0">
+              <a:lnSpc>
+                <a:spcPts val="1620"/>
+              </a:lnSpc>
+              <a:spcAft>
+                <a:spcPts val="300"/>
+              </a:spcAft>
+              <a:buNone/>
+            </a:pPr>
+            <a:r>
+              <a:rPr lang="en-US" sz="1200" dirty="0">
+                <a:solidFill>
+                  <a:srgbClr val="1C2833"/>
+                </a:solidFill>
+                <a:latin typeface="Arial" pitchFamily="34" charset="0"/>
+                <a:ea typeface="Arial" pitchFamily="34" charset="-122"/>
+                <a:cs typeface="Arial" pitchFamily="34" charset="-120"/>
+              </a:rPr>
               <a:t>sources.md</a:t>
             </a:r>
             <a:pPr algn="l" indent="0" marL="0">
               <a:lnSpc>
-                <a:spcPts val="1680"/>
-              </a:lnSpc>
-              <a:spcBef>
-                <a:spcPts val="300"/>
-              </a:spcBef>
+                <a:spcPts val="1620"/>
+              </a:lnSpc>
               <a:spcAft>
                 <a:spcPts val="300"/>
               </a:spcAft>
@@ -3401,7 +4564,7 @@
                 <a:ea typeface="Georgia" pitchFamily="34" charset="-122"/>
                 <a:cs typeface="Georgia" pitchFamily="34" charset="-120"/>
               </a:rPr>
-              <a:t>Materials</a:t>
+              <a:t>Learning objective</a:t>
             </a:r>
             <a:endParaRPr lang="en-US" sz="1800" dirty="0"/>
           </a:p>
@@ -3416,7 +4579,7 @@
         <p:spPr>
           <a:xfrm>
             <a:off x="406301" y="870942"/>
-            <a:ext cx="8498026" cy="658862"/>
+            <a:ext cx="8498026" cy="426541"/>
           </a:xfrm>
           <a:prstGeom prst="rect">
             <a:avLst/>
@@ -3449,99 +4612,7 @@
                 <a:ea typeface="Arial" pitchFamily="34" charset="-122"/>
                 <a:cs typeface="Arial" pitchFamily="34" charset="-120"/>
               </a:rPr>
-              <a:t>– Each student's Day 1 baseline sheet (returned to them). – Fresh copy of the SAME problem (5728 + 3417 + 6892 + 4536). – Formative quiz (</a:t>
-            </a:r>
-            <a:pPr algn="l" indent="0" marL="0">
-              <a:lnSpc>
-                <a:spcPts val="1680"/>
-              </a:lnSpc>
-              <a:spcBef>
-                <a:spcPts val="300"/>
-              </a:spcBef>
-              <a:spcAft>
-                <a:spcPts val="300"/>
-              </a:spcAft>
-              <a:buNone/>
-            </a:pPr>
-            <a:r>
-              <a:rPr lang="en-US" sz="1200" dirty="0">
-                <a:solidFill>
-                  <a:srgbClr val="1C2833"/>
-                </a:solidFill>
-                <a:latin typeface="Arial" pitchFamily="34" charset="0"/>
-                <a:ea typeface="Arial" pitchFamily="34" charset="-122"/>
-                <a:cs typeface="Arial" pitchFamily="34" charset="-120"/>
-              </a:rPr>
-              <a:t>quizzes/formative.md</a:t>
-            </a:r>
-            <a:pPr algn="l" indent="0" marL="0">
-              <a:lnSpc>
-                <a:spcPts val="1680"/>
-              </a:lnSpc>
-              <a:spcBef>
-                <a:spcPts val="300"/>
-              </a:spcBef>
-              <a:spcAft>
-                <a:spcPts val="300"/>
-              </a:spcAft>
-              <a:buNone/>
-            </a:pPr>
-            <a:r>
-              <a:rPr lang="en-US" sz="1200" dirty="0">
-                <a:solidFill>
-                  <a:srgbClr val="1C2833"/>
-                </a:solidFill>
-                <a:latin typeface="Arial" pitchFamily="34" charset="0"/>
-                <a:ea typeface="Arial" pitchFamily="34" charset="-122"/>
-                <a:cs typeface="Arial" pitchFamily="34" charset="-120"/>
-              </a:rPr>
-              <a:t> Part B) — 5 mixed problems. – Project brief handouts (</a:t>
-            </a:r>
-            <a:pPr algn="l" indent="0" marL="0">
-              <a:lnSpc>
-                <a:spcPts val="1680"/>
-              </a:lnSpc>
-              <a:spcBef>
-                <a:spcPts val="300"/>
-              </a:spcBef>
-              <a:spcAft>
-                <a:spcPts val="300"/>
-              </a:spcAft>
-              <a:buNone/>
-            </a:pPr>
-            <a:r>
-              <a:rPr lang="en-US" sz="1200" dirty="0">
-                <a:solidFill>
-                  <a:srgbClr val="1C2833"/>
-                </a:solidFill>
-                <a:latin typeface="Arial" pitchFamily="34" charset="0"/>
-                <a:ea typeface="Arial" pitchFamily="34" charset="-122"/>
-                <a:cs typeface="Arial" pitchFamily="34" charset="-120"/>
-              </a:rPr>
-              <a:t>assessments/project-brief.md</a:t>
-            </a:r>
-            <a:pPr algn="l" indent="0" marL="0">
-              <a:lnSpc>
-                <a:spcPts val="1680"/>
-              </a:lnSpc>
-              <a:spcBef>
-                <a:spcPts val="300"/>
-              </a:spcBef>
-              <a:spcAft>
-                <a:spcPts val="300"/>
-              </a:spcAft>
-              <a:buNone/>
-            </a:pPr>
-            <a:r>
-              <a:rPr lang="en-US" sz="1200" dirty="0">
-                <a:solidFill>
-                  <a:srgbClr val="1C2833"/>
-                </a:solidFill>
-                <a:latin typeface="Arial" pitchFamily="34" charset="0"/>
-                <a:ea typeface="Arial" pitchFamily="34" charset="-122"/>
-                <a:cs typeface="Arial" pitchFamily="34" charset="-120"/>
-              </a:rPr>
-              <a:t>).</a:t>
+              <a:t>By the end of this lesson, students will retest their Day 1 baseline using the dot method and submit a project plan paragraph.</a:t>
             </a:r>
             <a:endParaRPr lang="en-US" sz="1200" dirty="0"/>
           </a:p>
@@ -3699,7 +4770,7 @@
                 <a:ea typeface="Georgia" pitchFamily="34" charset="-122"/>
                 <a:cs typeface="Georgia" pitchFamily="34" charset="-120"/>
               </a:rPr>
-              <a:t>Lesson flow</a:t>
+              <a:t>Materials</a:t>
             </a:r>
             <a:endParaRPr lang="en-US" sz="1800" dirty="0"/>
           </a:p>
@@ -3708,6 +4779,204 @@
       <p:sp>
         <p:nvSpPr>
           <p:cNvPr id="4" name="Text 2"/>
+          <p:cNvSpPr/>
+          <p:nvPr/>
+        </p:nvSpPr>
+        <p:spPr>
+          <a:xfrm>
+            <a:off x="634901" y="883593"/>
+            <a:ext cx="8102798" cy="1051322"/>
+          </a:xfrm>
+          <a:prstGeom prst="rect">
+            <a:avLst/>
+          </a:prstGeom>
+          <a:noFill/>
+          <a:ln/>
+        </p:spPr>
+        <p:txBody>
+          <a:bodyPr wrap="square" lIns="0" tIns="0" rIns="0" bIns="0" rtlCol="0" anchor="t"/>
+          <a:lstStyle/>
+          <a:p>
+            <a:pPr algn="l" marL="342900" indent="-342900">
+              <a:lnSpc>
+                <a:spcPts val="1620"/>
+              </a:lnSpc>
+              <a:spcAft>
+                <a:spcPts val="300"/>
+              </a:spcAft>
+              <a:buSzPct val="100000"/>
+              <a:buChar char="•"/>
+            </a:pPr>
+            <a:r>
+              <a:rPr lang="en-US" sz="1200" dirty="0">
+                <a:solidFill>
+                  <a:srgbClr val="1C2833"/>
+                </a:solidFill>
+                <a:latin typeface="Arial" pitchFamily="34" charset="0"/>
+                <a:ea typeface="Arial" pitchFamily="34" charset="-122"/>
+                <a:cs typeface="Arial" pitchFamily="34" charset="-120"/>
+              </a:rPr>
+              <a:t>Each student's Day 1 baseline sheet (returned to them).</a:t>
+            </a:r>
+            <a:endParaRPr lang="en-US" sz="1200" dirty="0"/>
+          </a:p>
+          <a:p>
+            <a:pPr algn="l" marL="342900" indent="-342900">
+              <a:lnSpc>
+                <a:spcPts val="1620"/>
+              </a:lnSpc>
+              <a:spcAft>
+                <a:spcPts val="300"/>
+              </a:spcAft>
+              <a:buSzPct val="100000"/>
+              <a:buChar char="•"/>
+            </a:pPr>
+            <a:r>
+              <a:rPr lang="en-US" sz="1200" dirty="0">
+                <a:solidFill>
+                  <a:srgbClr val="1C2833"/>
+                </a:solidFill>
+                <a:latin typeface="Arial" pitchFamily="34" charset="0"/>
+                <a:ea typeface="Arial" pitchFamily="34" charset="-122"/>
+                <a:cs typeface="Arial" pitchFamily="34" charset="-120"/>
+              </a:rPr>
+              <a:t>Fresh copy of the SAME problem (5728 + 3417 + 6892 + 4536).</a:t>
+            </a:r>
+            <a:endParaRPr lang="en-US" sz="1200" dirty="0"/>
+          </a:p>
+          <a:p>
+            <a:pPr algn="l" marL="342900" indent="-342900">
+              <a:lnSpc>
+                <a:spcPts val="1620"/>
+              </a:lnSpc>
+              <a:spcAft>
+                <a:spcPts val="300"/>
+              </a:spcAft>
+              <a:buSzPct val="100000"/>
+              <a:buChar char="•"/>
+            </a:pPr>
+            <a:r>
+              <a:rPr lang="en-US" sz="1200" dirty="0">
+                <a:solidFill>
+                  <a:srgbClr val="1C2833"/>
+                </a:solidFill>
+                <a:latin typeface="Arial" pitchFamily="34" charset="0"/>
+                <a:ea typeface="Arial" pitchFamily="34" charset="-122"/>
+                <a:cs typeface="Arial" pitchFamily="34" charset="-120"/>
+              </a:rPr>
+              <a:t>Formative quiz (</a:t>
+            </a:r>
+            <a:pPr algn="l" indent="0" marL="0">
+              <a:lnSpc>
+                <a:spcPts val="1620"/>
+              </a:lnSpc>
+              <a:spcAft>
+                <a:spcPts val="300"/>
+              </a:spcAft>
+              <a:buNone/>
+            </a:pPr>
+            <a:r>
+              <a:rPr lang="en-US" sz="1200" dirty="0">
+                <a:solidFill>
+                  <a:srgbClr val="1C2833"/>
+                </a:solidFill>
+                <a:latin typeface="Arial" pitchFamily="34" charset="0"/>
+                <a:ea typeface="Arial" pitchFamily="34" charset="-122"/>
+                <a:cs typeface="Arial" pitchFamily="34" charset="-120"/>
+              </a:rPr>
+              <a:t>quizzes/formative.md</a:t>
+            </a:r>
+            <a:pPr algn="l" indent="0" marL="0">
+              <a:lnSpc>
+                <a:spcPts val="1620"/>
+              </a:lnSpc>
+              <a:spcAft>
+                <a:spcPts val="300"/>
+              </a:spcAft>
+              <a:buNone/>
+            </a:pPr>
+            <a:r>
+              <a:rPr lang="en-US" sz="1200" dirty="0">
+                <a:solidFill>
+                  <a:srgbClr val="1C2833"/>
+                </a:solidFill>
+                <a:latin typeface="Arial" pitchFamily="34" charset="0"/>
+                <a:ea typeface="Arial" pitchFamily="34" charset="-122"/>
+                <a:cs typeface="Arial" pitchFamily="34" charset="-120"/>
+              </a:rPr>
+              <a:t> Part B) — 5 mixed problems.</a:t>
+            </a:r>
+            <a:endParaRPr lang="en-US" sz="1200" dirty="0"/>
+          </a:p>
+          <a:p>
+            <a:pPr algn="l" marL="342900" indent="-342900">
+              <a:lnSpc>
+                <a:spcPts val="1620"/>
+              </a:lnSpc>
+              <a:spcAft>
+                <a:spcPts val="300"/>
+              </a:spcAft>
+              <a:buSzPct val="100000"/>
+              <a:buChar char="•"/>
+            </a:pPr>
+            <a:r>
+              <a:rPr lang="en-US" sz="1200" dirty="0">
+                <a:solidFill>
+                  <a:srgbClr val="1C2833"/>
+                </a:solidFill>
+                <a:latin typeface="Arial" pitchFamily="34" charset="0"/>
+                <a:ea typeface="Arial" pitchFamily="34" charset="-122"/>
+                <a:cs typeface="Arial" pitchFamily="34" charset="-120"/>
+              </a:rPr>
+              <a:t>Project brief handouts (</a:t>
+            </a:r>
+            <a:pPr algn="l" indent="0" marL="0">
+              <a:lnSpc>
+                <a:spcPts val="1620"/>
+              </a:lnSpc>
+              <a:spcAft>
+                <a:spcPts val="300"/>
+              </a:spcAft>
+              <a:buNone/>
+            </a:pPr>
+            <a:r>
+              <a:rPr lang="en-US" sz="1200" dirty="0">
+                <a:solidFill>
+                  <a:srgbClr val="1C2833"/>
+                </a:solidFill>
+                <a:latin typeface="Arial" pitchFamily="34" charset="0"/>
+                <a:ea typeface="Arial" pitchFamily="34" charset="-122"/>
+                <a:cs typeface="Arial" pitchFamily="34" charset="-120"/>
+              </a:rPr>
+              <a:t>assessments/project-brief.md</a:t>
+            </a:r>
+            <a:pPr algn="l" indent="0" marL="0">
+              <a:lnSpc>
+                <a:spcPts val="1620"/>
+              </a:lnSpc>
+              <a:spcAft>
+                <a:spcPts val="300"/>
+              </a:spcAft>
+              <a:buNone/>
+            </a:pPr>
+            <a:r>
+              <a:rPr lang="en-US" sz="1200" dirty="0">
+                <a:solidFill>
+                  <a:srgbClr val="1C2833"/>
+                </a:solidFill>
+                <a:latin typeface="Arial" pitchFamily="34" charset="0"/>
+                <a:ea typeface="Arial" pitchFamily="34" charset="-122"/>
+                <a:cs typeface="Arial" pitchFamily="34" charset="-120"/>
+              </a:rPr>
+              <a:t>).</a:t>
+            </a:r>
+            <a:endParaRPr lang="en-US" sz="1200" dirty="0"/>
+          </a:p>
+        </p:txBody>
+      </p:sp>
+      <p:sp>
+        <p:nvSpPr>
+          <p:cNvPr id="5" name="Text 3"/>
           <p:cNvSpPr/>
           <p:nvPr/>
         </p:nvSpPr>
@@ -3857,7 +5126,7 @@
                 <a:ea typeface="Georgia" pitchFamily="34" charset="-122"/>
                 <a:cs typeface="Georgia" pitchFamily="34" charset="-120"/>
               </a:rPr>
-              <a:t>Warm-up (3 min)</a:t>
+              <a:t>Lesson flow</a:t>
             </a:r>
             <a:endParaRPr lang="en-US" sz="1800" dirty="0"/>
           </a:p>
@@ -3866,54 +5135,6 @@
       <p:sp>
         <p:nvSpPr>
           <p:cNvPr id="4" name="Text 2"/>
-          <p:cNvSpPr/>
-          <p:nvPr/>
-        </p:nvSpPr>
-        <p:spPr>
-          <a:xfrm>
-            <a:off x="406301" y="870942"/>
-            <a:ext cx="8498026" cy="426541"/>
-          </a:xfrm>
-          <a:prstGeom prst="rect">
-            <a:avLst/>
-          </a:prstGeom>
-          <a:noFill/>
-          <a:ln/>
-        </p:spPr>
-        <p:txBody>
-          <a:bodyPr wrap="square" lIns="0" tIns="0" rIns="0" bIns="0" rtlCol="0" anchor="t"/>
-          <a:lstStyle/>
-          <a:p>
-            <a:pPr algn="l" indent="0" marL="0">
-              <a:lnSpc>
-                <a:spcPts val="1680"/>
-              </a:lnSpc>
-              <a:spcBef>
-                <a:spcPts val="300"/>
-              </a:spcBef>
-              <a:spcAft>
-                <a:spcPts val="300"/>
-              </a:spcAft>
-              <a:buNone/>
-            </a:pPr>
-            <a:r>
-              <a:rPr lang="en-US" sz="1200" dirty="0">
-                <a:solidFill>
-                  <a:srgbClr val="1C2833"/>
-                </a:solidFill>
-                <a:latin typeface="Arial" pitchFamily="34" charset="0"/>
-                <a:ea typeface="Arial" pitchFamily="34" charset="-122"/>
-                <a:cs typeface="Arial" pitchFamily="34" charset="-120"/>
-              </a:rPr>
-              <a:t>– Make-10 lightning round (30 sec; should be effortless by now). – Brief: "Today is your retest. The same problem you did on Day 1, with the new method. We'll see how much you've sped up."</a:t>
-            </a:r>
-            <a:endParaRPr lang="en-US" sz="1200" dirty="0"/>
-          </a:p>
-        </p:txBody>
-      </p:sp>
-      <p:sp>
-        <p:nvSpPr>
-          <p:cNvPr id="5" name="Text 3"/>
           <p:cNvSpPr/>
           <p:nvPr/>
         </p:nvSpPr>
@@ -4063,7 +5284,7 @@
                 <a:ea typeface="Georgia" pitchFamily="34" charset="-122"/>
                 <a:cs typeface="Georgia" pitchFamily="34" charset="-120"/>
               </a:rPr>
-              <a:t>Speed retest (5 min)</a:t>
+              <a:t>Warm-up (3 min)</a:t>
             </a:r>
             <a:endParaRPr lang="en-US" sz="1800" dirty="0"/>
           </a:p>
@@ -4077,8 +5298,8 @@
         </p:nvSpPr>
         <p:spPr>
           <a:xfrm>
-            <a:off x="406301" y="870942"/>
-            <a:ext cx="8498026" cy="426541"/>
+            <a:off x="634901" y="883593"/>
+            <a:ext cx="8102798" cy="731341"/>
           </a:xfrm>
           <a:prstGeom prst="rect">
             <a:avLst/>
@@ -4090,17 +5311,15 @@
           <a:bodyPr wrap="square" lIns="0" tIns="0" rIns="0" bIns="0" rtlCol="0" anchor="t"/>
           <a:lstStyle/>
           <a:p>
-            <a:pPr algn="l" indent="0" marL="0">
-              <a:lnSpc>
-                <a:spcPts val="1680"/>
-              </a:lnSpc>
-              <a:spcBef>
-                <a:spcPts val="300"/>
-              </a:spcBef>
-              <a:spcAft>
-                <a:spcPts val="300"/>
-              </a:spcAft>
-              <a:buNone/>
+            <a:pPr algn="l" marL="342900" indent="-342900">
+              <a:lnSpc>
+                <a:spcPts val="1620"/>
+              </a:lnSpc>
+              <a:spcAft>
+                <a:spcPts val="300"/>
+              </a:spcAft>
+              <a:buSzPct val="100000"/>
+              <a:buChar char="•"/>
             </a:pPr>
             <a:r>
               <a:rPr lang="en-US" sz="1200" dirty="0">
@@ -4111,7 +5330,31 @@
                 <a:ea typeface="Arial" pitchFamily="34" charset="-122"/>
                 <a:cs typeface="Arial" pitchFamily="34" charset="-120"/>
               </a:rPr>
-              <a:t>– Hand out the fresh sheet. – On "Go," solve using dot method. Record time. – Compare to Day 1 baseline. Average gain: target 50% reduction in time.</a:t>
+              <a:t>Make-10 lightning round (30 sec; should be effortless by now).</a:t>
+            </a:r>
+            <a:endParaRPr lang="en-US" sz="1200" dirty="0"/>
+          </a:p>
+          <a:p>
+            <a:pPr algn="l" marL="342900" indent="-342900">
+              <a:lnSpc>
+                <a:spcPts val="1620"/>
+              </a:lnSpc>
+              <a:spcAft>
+                <a:spcPts val="300"/>
+              </a:spcAft>
+              <a:buSzPct val="100000"/>
+              <a:buChar char="•"/>
+            </a:pPr>
+            <a:r>
+              <a:rPr lang="en-US" sz="1200" dirty="0">
+                <a:solidFill>
+                  <a:srgbClr val="1C2833"/>
+                </a:solidFill>
+                <a:latin typeface="Arial" pitchFamily="34" charset="0"/>
+                <a:ea typeface="Arial" pitchFamily="34" charset="-122"/>
+                <a:cs typeface="Arial" pitchFamily="34" charset="-120"/>
+              </a:rPr>
+              <a:t>Brief: "Today is your retest. The same problem you did on Day 1, with the new method. We'll see how much you've sped up."</a:t>
             </a:r>
             <a:endParaRPr lang="en-US" sz="1200" dirty="0"/>
           </a:p>
@@ -4236,7 +5479,7 @@
         <p:spPr>
           <a:xfrm>
             <a:off x="406301" y="457051"/>
-            <a:ext cx="8498026" cy="293340"/>
+            <a:ext cx="8498026" cy="274290"/>
           </a:xfrm>
           <a:prstGeom prst="rect">
             <a:avLst/>
@@ -4261,7 +5504,7 @@
               <a:buNone/>
             </a:pPr>
             <a:r>
-              <a:rPr lang="en-US" sz="1800" dirty="0">
+              <a:rPr lang="en-US" sz="1800" b="1" dirty="0">
                 <a:solidFill>
                   <a:srgbClr val="FE4447"/>
                 </a:solidFill>
@@ -4269,53 +5512,7 @@
                 <a:ea typeface="Georgia" pitchFamily="34" charset="-122"/>
                 <a:cs typeface="Georgia" pitchFamily="34" charset="-120"/>
               </a:rPr>
-              <a:t>Formative quiz (15 min) — </a:t>
-            </a:r>
-            <a:pPr algn="l" indent="0" marL="0">
-              <a:lnSpc>
-                <a:spcPts val="2160"/>
-              </a:lnSpc>
-              <a:spcBef>
-                <a:spcPts val="600"/>
-              </a:spcBef>
-              <a:spcAft>
-                <a:spcPts val="800"/>
-              </a:spcAft>
-              <a:buNone/>
-            </a:pPr>
-            <a:r>
-              <a:rPr lang="en-US" sz="1800" b="1" dirty="0">
-                <a:solidFill>
-                  <a:srgbClr val="FE4447"/>
-                </a:solidFill>
-                <a:latin typeface="Georgia" pitchFamily="34" charset="0"/>
-                <a:ea typeface="Georgia" pitchFamily="34" charset="-122"/>
-                <a:cs typeface="Georgia" pitchFamily="34" charset="-120"/>
-              </a:rPr>
-              <a:t>quizzes/formative.md</a:t>
-            </a:r>
-            <a:pPr algn="l" indent="0" marL="0">
-              <a:lnSpc>
-                <a:spcPts val="2160"/>
-              </a:lnSpc>
-              <a:spcBef>
-                <a:spcPts val="600"/>
-              </a:spcBef>
-              <a:spcAft>
-                <a:spcPts val="800"/>
-              </a:spcAft>
-              <a:buNone/>
-            </a:pPr>
-            <a:r>
-              <a:rPr lang="en-US" sz="1800" dirty="0">
-                <a:solidFill>
-                  <a:srgbClr val="FE4447"/>
-                </a:solidFill>
-                <a:latin typeface="Georgia" pitchFamily="34" charset="0"/>
-                <a:ea typeface="Georgia" pitchFamily="34" charset="-122"/>
-                <a:cs typeface="Georgia" pitchFamily="34" charset="-120"/>
-              </a:rPr>
-              <a:t> Part B</a:t>
+              <a:t>Speed retest (5 min)</a:t>
             </a:r>
             <a:endParaRPr lang="en-US" sz="1800" dirty="0"/>
           </a:p>
@@ -4329,8 +5526,8 @@
         </p:nvSpPr>
         <p:spPr>
           <a:xfrm>
-            <a:off x="406301" y="889992"/>
-            <a:ext cx="8498026" cy="426541"/>
+            <a:off x="634901" y="883593"/>
+            <a:ext cx="8102798" cy="769441"/>
           </a:xfrm>
           <a:prstGeom prst="rect">
             <a:avLst/>
@@ -4342,17 +5539,15 @@
           <a:bodyPr wrap="square" lIns="0" tIns="0" rIns="0" bIns="0" rtlCol="0" anchor="t"/>
           <a:lstStyle/>
           <a:p>
-            <a:pPr algn="l" indent="0" marL="0">
-              <a:lnSpc>
-                <a:spcPts val="1680"/>
-              </a:lnSpc>
-              <a:spcBef>
-                <a:spcPts val="300"/>
-              </a:spcBef>
-              <a:spcAft>
-                <a:spcPts val="300"/>
-              </a:spcAft>
-              <a:buNone/>
+            <a:pPr algn="l" marL="342900" indent="-342900">
+              <a:lnSpc>
+                <a:spcPts val="1620"/>
+              </a:lnSpc>
+              <a:spcAft>
+                <a:spcPts val="300"/>
+              </a:spcAft>
+              <a:buSzPct val="100000"/>
+              <a:buChar char="•"/>
             </a:pPr>
             <a:r>
               <a:rPr lang="en-US" sz="1200" dirty="0">
@@ -4363,7 +5558,55 @@
                 <a:ea typeface="Arial" pitchFamily="34" charset="-122"/>
                 <a:cs typeface="Arial" pitchFamily="34" charset="-120"/>
               </a:rPr>
-              <a:t>– 5 mixed problems:   – 2 single-column adds   – 2 multi-column 3×3 adds   – 1 multi-column 4×4 add (the retest doesn't count) – Closed notebook. – 12 min to solve + 3 min for class review.</a:t>
+              <a:t>Hand out the fresh sheet.</a:t>
+            </a:r>
+            <a:endParaRPr lang="en-US" sz="1200" dirty="0"/>
+          </a:p>
+          <a:p>
+            <a:pPr algn="l" marL="342900" indent="-342900">
+              <a:lnSpc>
+                <a:spcPts val="1620"/>
+              </a:lnSpc>
+              <a:spcAft>
+                <a:spcPts val="300"/>
+              </a:spcAft>
+              <a:buSzPct val="100000"/>
+              <a:buChar char="•"/>
+            </a:pPr>
+            <a:r>
+              <a:rPr lang="en-US" sz="1200" dirty="0">
+                <a:solidFill>
+                  <a:srgbClr val="1C2833"/>
+                </a:solidFill>
+                <a:latin typeface="Arial" pitchFamily="34" charset="0"/>
+                <a:ea typeface="Arial" pitchFamily="34" charset="-122"/>
+                <a:cs typeface="Arial" pitchFamily="34" charset="-120"/>
+              </a:rPr>
+              <a:t>On "Go," solve using dot method. Record time.</a:t>
+            </a:r>
+            <a:endParaRPr lang="en-US" sz="1200" dirty="0"/>
+          </a:p>
+          <a:p>
+            <a:pPr algn="l" marL="342900" indent="-342900">
+              <a:lnSpc>
+                <a:spcPts val="1620"/>
+              </a:lnSpc>
+              <a:spcAft>
+                <a:spcPts val="300"/>
+              </a:spcAft>
+              <a:buSzPct val="100000"/>
+              <a:buChar char="•"/>
+            </a:pPr>
+            <a:r>
+              <a:rPr lang="en-US" sz="1200" dirty="0">
+                <a:solidFill>
+                  <a:srgbClr val="1C2833"/>
+                </a:solidFill>
+                <a:latin typeface="Arial" pitchFamily="34" charset="0"/>
+                <a:ea typeface="Arial" pitchFamily="34" charset="-122"/>
+                <a:cs typeface="Arial" pitchFamily="34" charset="-120"/>
+              </a:rPr>
+              <a:t>Compare to Day 1 baseline. Average gain: target 50% reduction in time.</a:t>
             </a:r>
             <a:endParaRPr lang="en-US" sz="1200" dirty="0"/>
           </a:p>
@@ -4488,7 +5731,7 @@
         <p:spPr>
           <a:xfrm>
             <a:off x="406301" y="457051"/>
-            <a:ext cx="8498026" cy="274290"/>
+            <a:ext cx="8498026" cy="293340"/>
           </a:xfrm>
           <a:prstGeom prst="rect">
             <a:avLst/>
@@ -4513,7 +5756,7 @@
               <a:buNone/>
             </a:pPr>
             <a:r>
-              <a:rPr lang="en-US" sz="1800" b="1" dirty="0">
+              <a:rPr lang="en-US" sz="1800" dirty="0">
                 <a:solidFill>
                   <a:srgbClr val="FE4447"/>
                 </a:solidFill>
@@ -4521,7 +5764,53 @@
                 <a:ea typeface="Georgia" pitchFamily="34" charset="-122"/>
                 <a:cs typeface="Georgia" pitchFamily="34" charset="-120"/>
               </a:rPr>
-              <a:t>Project commitment (15 min)</a:t>
+              <a:t>Formative quiz (15 min) — </a:t>
+            </a:r>
+            <a:pPr algn="l" indent="0" marL="0">
+              <a:lnSpc>
+                <a:spcPts val="2160"/>
+              </a:lnSpc>
+              <a:spcBef>
+                <a:spcPts val="600"/>
+              </a:spcBef>
+              <a:spcAft>
+                <a:spcPts val="800"/>
+              </a:spcAft>
+              <a:buNone/>
+            </a:pPr>
+            <a:r>
+              <a:rPr lang="en-US" sz="1800" b="1" dirty="0">
+                <a:solidFill>
+                  <a:srgbClr val="FE4447"/>
+                </a:solidFill>
+                <a:latin typeface="Georgia" pitchFamily="34" charset="0"/>
+                <a:ea typeface="Georgia" pitchFamily="34" charset="-122"/>
+                <a:cs typeface="Georgia" pitchFamily="34" charset="-120"/>
+              </a:rPr>
+              <a:t>quizzes/formative.md</a:t>
+            </a:r>
+            <a:pPr algn="l" indent="0" marL="0">
+              <a:lnSpc>
+                <a:spcPts val="2160"/>
+              </a:lnSpc>
+              <a:spcBef>
+                <a:spcPts val="600"/>
+              </a:spcBef>
+              <a:spcAft>
+                <a:spcPts val="800"/>
+              </a:spcAft>
+              <a:buNone/>
+            </a:pPr>
+            <a:r>
+              <a:rPr lang="en-US" sz="1800" dirty="0">
+                <a:solidFill>
+                  <a:srgbClr val="FE4447"/>
+                </a:solidFill>
+                <a:latin typeface="Georgia" pitchFamily="34" charset="0"/>
+                <a:ea typeface="Georgia" pitchFamily="34" charset="-122"/>
+                <a:cs typeface="Georgia" pitchFamily="34" charset="-120"/>
+              </a:rPr>
+              <a:t> Part B</a:t>
             </a:r>
             <a:endParaRPr lang="en-US" sz="1800" dirty="0"/>
           </a:p>
@@ -4535,8 +5824,8 @@
         </p:nvSpPr>
         <p:spPr>
           <a:xfrm>
-            <a:off x="406301" y="870942"/>
-            <a:ext cx="8498026" cy="853083"/>
+            <a:off x="634901" y="902643"/>
+            <a:ext cx="8102798" cy="1500783"/>
           </a:xfrm>
           <a:prstGeom prst="rect">
             <a:avLst/>
@@ -4548,17 +5837,15 @@
           <a:bodyPr wrap="square" lIns="0" tIns="0" rIns="0" bIns="0" rtlCol="0" anchor="t"/>
           <a:lstStyle/>
           <a:p>
-            <a:pPr algn="l" indent="0" marL="0">
-              <a:lnSpc>
-                <a:spcPts val="1680"/>
-              </a:lnSpc>
-              <a:spcBef>
-                <a:spcPts val="300"/>
-              </a:spcBef>
-              <a:spcAft>
-                <a:spcPts val="300"/>
-              </a:spcAft>
-              <a:buNone/>
+            <a:pPr algn="l" marL="342900" indent="-342900">
+              <a:lnSpc>
+                <a:spcPts val="1620"/>
+              </a:lnSpc>
+              <a:spcAft>
+                <a:spcPts val="300"/>
+              </a:spcAft>
+              <a:buSzPct val="100000"/>
+              <a:buChar char="•"/>
             </a:pPr>
             <a:r>
               <a:rPr lang="en-US" sz="1200" dirty="0">
@@ -4569,42 +5856,20 @@
                 <a:ea typeface="Arial" pitchFamily="34" charset="-122"/>
                 <a:cs typeface="Arial" pitchFamily="34" charset="-120"/>
               </a:rPr>
-              <a:t>– Hand out project brief. – Read aloud the three project formats: 1. </a:t>
-            </a:r>
-            <a:pPr algn="l" indent="0" marL="0">
-              <a:lnSpc>
-                <a:spcPts val="1680"/>
-              </a:lnSpc>
-              <a:spcBef>
-                <a:spcPts val="300"/>
-              </a:spcBef>
-              <a:spcAft>
-                <a:spcPts val="300"/>
-              </a:spcAft>
-              <a:buNone/>
-            </a:pPr>
-            <a:r>
-              <a:rPr lang="en-US" sz="1200" b="1" dirty="0">
-                <a:solidFill>
-                  <a:srgbClr val="1C2833"/>
-                </a:solidFill>
-                <a:latin typeface="Arial" pitchFamily="34" charset="0"/>
-                <a:ea typeface="Arial" pitchFamily="34" charset="-122"/>
-                <a:cs typeface="Arial" pitchFamily="34" charset="-120"/>
-              </a:rPr>
-              <a:t>60-second teaching video</a:t>
-            </a:r>
-            <a:pPr algn="l" indent="0" marL="0">
-              <a:lnSpc>
-                <a:spcPts val="1680"/>
-              </a:lnSpc>
-              <a:spcBef>
-                <a:spcPts val="300"/>
-              </a:spcBef>
-              <a:spcAft>
-                <a:spcPts val="300"/>
-              </a:spcAft>
-              <a:buNone/>
+              <a:t>5 mixed problems:</a:t>
+            </a:r>
+            <a:endParaRPr lang="en-US" sz="1200" dirty="0"/>
+          </a:p>
+          <a:p>
+            <a:pPr algn="l" marL="342900" indent="-342900">
+              <a:lnSpc>
+                <a:spcPts val="1620"/>
+              </a:lnSpc>
+              <a:spcAft>
+                <a:spcPts val="300"/>
+              </a:spcAft>
+              <a:buSzPct val="100000"/>
+              <a:buChar char="•"/>
             </a:pPr>
             <a:r>
               <a:rPr lang="en-US" sz="1200" dirty="0">
@@ -4615,42 +5880,20 @@
                 <a:ea typeface="Arial" pitchFamily="34" charset="-122"/>
                 <a:cs typeface="Arial" pitchFamily="34" charset="-120"/>
               </a:rPr>
-              <a:t> — teach a younger student (Grade 4) the dot method. 2. </a:t>
-            </a:r>
-            <a:pPr algn="l" indent="0" marL="0">
-              <a:lnSpc>
-                <a:spcPts val="1680"/>
-              </a:lnSpc>
-              <a:spcBef>
-                <a:spcPts val="300"/>
-              </a:spcBef>
-              <a:spcAft>
-                <a:spcPts val="300"/>
-              </a:spcAft>
-              <a:buNone/>
-            </a:pPr>
-            <a:r>
-              <a:rPr lang="en-US" sz="1200" b="1" dirty="0">
-                <a:solidFill>
-                  <a:srgbClr val="1C2833"/>
-                </a:solidFill>
-                <a:latin typeface="Arial" pitchFamily="34" charset="0"/>
-                <a:ea typeface="Arial" pitchFamily="34" charset="-122"/>
-                <a:cs typeface="Arial" pitchFamily="34" charset="-120"/>
-              </a:rPr>
-              <a:t>Printed workbook</a:t>
-            </a:r>
-            <a:pPr algn="l" indent="0" marL="0">
-              <a:lnSpc>
-                <a:spcPts val="1680"/>
-              </a:lnSpc>
-              <a:spcBef>
-                <a:spcPts val="300"/>
-              </a:spcBef>
-              <a:spcAft>
-                <a:spcPts val="300"/>
-              </a:spcAft>
-              <a:buNone/>
+              <a:t>2 single-column adds</a:t>
+            </a:r>
+            <a:endParaRPr lang="en-US" sz="1200" dirty="0"/>
+          </a:p>
+          <a:p>
+            <a:pPr algn="l" marL="342900" indent="-342900">
+              <a:lnSpc>
+                <a:spcPts val="1620"/>
+              </a:lnSpc>
+              <a:spcAft>
+                <a:spcPts val="300"/>
+              </a:spcAft>
+              <a:buSzPct val="100000"/>
+              <a:buChar char="•"/>
             </a:pPr>
             <a:r>
               <a:rPr lang="en-US" sz="1200" dirty="0">
@@ -4661,42 +5904,20 @@
                 <a:ea typeface="Arial" pitchFamily="34" charset="-122"/>
                 <a:cs typeface="Arial" pitchFamily="34" charset="-120"/>
               </a:rPr>
-              <a:t> — 20 problems with worked solutions using the dot method, designed for self-study. 3. </a:t>
-            </a:r>
-            <a:pPr algn="l" indent="0" marL="0">
-              <a:lnSpc>
-                <a:spcPts val="1680"/>
-              </a:lnSpc>
-              <a:spcBef>
-                <a:spcPts val="300"/>
-              </a:spcBef>
-              <a:spcAft>
-                <a:spcPts val="300"/>
-              </a:spcAft>
-              <a:buNone/>
-            </a:pPr>
-            <a:r>
-              <a:rPr lang="en-US" sz="1200" b="1" dirty="0">
-                <a:solidFill>
-                  <a:srgbClr val="1C2833"/>
-                </a:solidFill>
-                <a:latin typeface="Arial" pitchFamily="34" charset="0"/>
-                <a:ea typeface="Arial" pitchFamily="34" charset="-122"/>
-                <a:cs typeface="Arial" pitchFamily="34" charset="-120"/>
-              </a:rPr>
-              <a:t>Comparative speed-test data project</a:t>
-            </a:r>
-            <a:pPr algn="l" indent="0" marL="0">
-              <a:lnSpc>
-                <a:spcPts val="1680"/>
-              </a:lnSpc>
-              <a:spcBef>
-                <a:spcPts val="300"/>
-              </a:spcBef>
-              <a:spcAft>
-                <a:spcPts val="300"/>
-              </a:spcAft>
-              <a:buNone/>
+              <a:t>2 multi-column 3×3 adds</a:t>
+            </a:r>
+            <a:endParaRPr lang="en-US" sz="1200" dirty="0"/>
+          </a:p>
+          <a:p>
+            <a:pPr algn="l" marL="342900" indent="-342900">
+              <a:lnSpc>
+                <a:spcPts val="1620"/>
+              </a:lnSpc>
+              <a:spcAft>
+                <a:spcPts val="300"/>
+              </a:spcAft>
+              <a:buSzPct val="100000"/>
+              <a:buChar char="•"/>
             </a:pPr>
             <a:r>
               <a:rPr lang="en-US" sz="1200" dirty="0">
@@ -4707,63 +5928,63 @@
                 <a:ea typeface="Arial" pitchFamily="34" charset="-122"/>
                 <a:cs typeface="Arial" pitchFamily="34" charset="-120"/>
               </a:rPr>
-              <a:t> — collect Day-1-style baseline + Day-5-style retest data from 5–10 family members or schoolmates. Plot the results.</a:t>
+              <a:t>1 multi-column 4×4 add (the retest doesn't count)</a:t>
             </a:r>
             <a:endParaRPr lang="en-US" sz="1200" dirty="0"/>
           </a:p>
+          <a:p>
+            <a:pPr algn="l" marL="342900" indent="-342900">
+              <a:lnSpc>
+                <a:spcPts val="1620"/>
+              </a:lnSpc>
+              <a:spcAft>
+                <a:spcPts val="300"/>
+              </a:spcAft>
+              <a:buSzPct val="100000"/>
+              <a:buChar char="•"/>
+            </a:pPr>
+            <a:r>
+              <a:rPr lang="en-US" sz="1200" dirty="0">
+                <a:solidFill>
+                  <a:srgbClr val="1C2833"/>
+                </a:solidFill>
+                <a:latin typeface="Arial" pitchFamily="34" charset="0"/>
+                <a:ea typeface="Arial" pitchFamily="34" charset="-122"/>
+                <a:cs typeface="Arial" pitchFamily="34" charset="-120"/>
+              </a:rPr>
+              <a:t>Closed notebook.</a:t>
+            </a:r>
+            <a:endParaRPr lang="en-US" sz="1200" dirty="0"/>
+          </a:p>
+          <a:p>
+            <a:pPr algn="l" marL="342900" indent="-342900">
+              <a:lnSpc>
+                <a:spcPts val="1620"/>
+              </a:lnSpc>
+              <a:spcAft>
+                <a:spcPts val="300"/>
+              </a:spcAft>
+              <a:buSzPct val="100000"/>
+              <a:buChar char="•"/>
+            </a:pPr>
+            <a:r>
+              <a:rPr lang="en-US" sz="1200" dirty="0">
+                <a:solidFill>
+                  <a:srgbClr val="1C2833"/>
+                </a:solidFill>
+                <a:latin typeface="Arial" pitchFamily="34" charset="0"/>
+                <a:ea typeface="Arial" pitchFamily="34" charset="-122"/>
+                <a:cs typeface="Arial" pitchFamily="34" charset="-120"/>
+              </a:rPr>
+              <a:t>12 min to solve + 3 min for class review.</a:t>
+            </a:r>
+            <a:endParaRPr lang="en-US" sz="1200" dirty="0"/>
+          </a:p>
         </p:txBody>
       </p:sp>
       <p:sp>
         <p:nvSpPr>
           <p:cNvPr id="5" name="Text 3"/>
-          <p:cNvSpPr/>
-          <p:nvPr/>
-        </p:nvSpPr>
-        <p:spPr>
-          <a:xfrm>
-            <a:off x="406301" y="1800225"/>
-            <a:ext cx="8498026" cy="426541"/>
-          </a:xfrm>
-          <a:prstGeom prst="rect">
-            <a:avLst/>
-          </a:prstGeom>
-          <a:noFill/>
-          <a:ln/>
-        </p:spPr>
-        <p:txBody>
-          <a:bodyPr wrap="square" lIns="0" tIns="0" rIns="0" bIns="0" rtlCol="0" anchor="t"/>
-          <a:lstStyle/>
-          <a:p>
-            <a:pPr algn="l" indent="0" marL="0">
-              <a:lnSpc>
-                <a:spcPts val="1680"/>
-              </a:lnSpc>
-              <a:spcBef>
-                <a:spcPts val="300"/>
-              </a:spcBef>
-              <a:spcAft>
-                <a:spcPts val="300"/>
-              </a:spcAft>
-              <a:buNone/>
-            </a:pPr>
-            <a:r>
-              <a:rPr lang="en-US" sz="1200" dirty="0">
-                <a:solidFill>
-                  <a:srgbClr val="1C2833"/>
-                </a:solidFill>
-                <a:latin typeface="Arial" pitchFamily="34" charset="0"/>
-                <a:ea typeface="Arial" pitchFamily="34" charset="-122"/>
-                <a:cs typeface="Arial" pitchFamily="34" charset="-120"/>
-              </a:rPr>
-              <a:t>– Pairs (or individuals) choose a format AND a partner by end of class. – Each pair writes a 1-sentence "what we'll do" on a sticky note, posts to the board under their format.</a:t>
-            </a:r>
-            <a:endParaRPr lang="en-US" sz="1200" dirty="0"/>
-          </a:p>
-        </p:txBody>
-      </p:sp>
-      <p:sp>
-        <p:nvSpPr>
-          <p:cNvPr id="6" name="Text 4"/>
           <p:cNvSpPr/>
           <p:nvPr/>
         </p:nvSpPr>
@@ -4913,7 +6134,7 @@
                 <a:ea typeface="Georgia" pitchFamily="34" charset="-122"/>
                 <a:cs typeface="Georgia" pitchFamily="34" charset="-120"/>
               </a:rPr>
-              <a:t>Wrap-up (7 min)</a:t>
+              <a:t>Project commitment (15 min)</a:t>
             </a:r>
             <a:endParaRPr lang="en-US" sz="1800" dirty="0"/>
           </a:p>
@@ -4927,8 +6148,8 @@
         </p:nvSpPr>
         <p:spPr>
           <a:xfrm>
-            <a:off x="406301" y="870942"/>
-            <a:ext cx="8498026" cy="639812"/>
+            <a:off x="634901" y="883593"/>
+            <a:ext cx="8102798" cy="1462683"/>
           </a:xfrm>
           <a:prstGeom prst="rect">
             <a:avLst/>
@@ -4940,13 +6161,79 @@
           <a:bodyPr wrap="square" lIns="0" tIns="0" rIns="0" bIns="0" rtlCol="0" anchor="t"/>
           <a:lstStyle/>
           <a:p>
+            <a:pPr algn="l" marL="342900" indent="-342900">
+              <a:lnSpc>
+                <a:spcPts val="1620"/>
+              </a:lnSpc>
+              <a:spcAft>
+                <a:spcPts val="300"/>
+              </a:spcAft>
+              <a:buSzPct val="100000"/>
+              <a:buChar char="•"/>
+            </a:pPr>
+            <a:r>
+              <a:rPr lang="en-US" sz="1200" dirty="0">
+                <a:solidFill>
+                  <a:srgbClr val="1C2833"/>
+                </a:solidFill>
+                <a:latin typeface="Arial" pitchFamily="34" charset="0"/>
+                <a:ea typeface="Arial" pitchFamily="34" charset="-122"/>
+                <a:cs typeface="Arial" pitchFamily="34" charset="-120"/>
+              </a:rPr>
+              <a:t>Hand out project brief.</a:t>
+            </a:r>
+            <a:endParaRPr lang="en-US" sz="1200" dirty="0"/>
+          </a:p>
+          <a:p>
+            <a:pPr algn="l" marL="342900" indent="-342900">
+              <a:lnSpc>
+                <a:spcPts val="1620"/>
+              </a:lnSpc>
+              <a:spcAft>
+                <a:spcPts val="300"/>
+              </a:spcAft>
+              <a:buSzPct val="100000"/>
+              <a:buChar char="•"/>
+            </a:pPr>
+            <a:r>
+              <a:rPr lang="en-US" sz="1200" dirty="0">
+                <a:solidFill>
+                  <a:srgbClr val="1C2833"/>
+                </a:solidFill>
+                <a:latin typeface="Arial" pitchFamily="34" charset="0"/>
+                <a:ea typeface="Arial" pitchFamily="34" charset="-122"/>
+                <a:cs typeface="Arial" pitchFamily="34" charset="-120"/>
+              </a:rPr>
+              <a:t>Read aloud the three project formats:</a:t>
+            </a:r>
+            <a:endParaRPr lang="en-US" sz="1200" dirty="0"/>
+          </a:p>
+          <a:p>
+            <a:pPr algn="l" marL="342900" indent="-342900">
+              <a:lnSpc>
+                <a:spcPts val="1620"/>
+              </a:lnSpc>
+              <a:spcAft>
+                <a:spcPts val="300"/>
+              </a:spcAft>
+              <a:buSzPct val="100000"/>
+              <a:buChar char="•"/>
+            </a:pPr>
+            <a:r>
+              <a:rPr lang="en-US" sz="1200" b="1" dirty="0">
+                <a:solidFill>
+                  <a:srgbClr val="1C2833"/>
+                </a:solidFill>
+                <a:latin typeface="Arial" pitchFamily="34" charset="0"/>
+                <a:ea typeface="Arial" pitchFamily="34" charset="-122"/>
+                <a:cs typeface="Arial" pitchFamily="34" charset="-120"/>
+              </a:rPr>
+              <a:t>60-second teaching video</a:t>
+            </a:r>
             <a:pPr algn="l" indent="0" marL="0">
               <a:lnSpc>
-                <a:spcPts val="1680"/>
-              </a:lnSpc>
-              <a:spcBef>
-                <a:spcPts val="300"/>
-              </a:spcBef>
+                <a:spcPts val="1620"/>
+              </a:lnSpc>
               <a:spcAft>
                 <a:spcPts val="300"/>
               </a:spcAft>
@@ -4961,38 +6248,80 @@
                 <a:ea typeface="Arial" pitchFamily="34" charset="-122"/>
                 <a:cs typeface="Arial" pitchFamily="34" charset="-120"/>
               </a:rPr>
-              <a:t>– Show of hands by gain category: &lt;0% (slower), 0–25% faster, 25–50% faster, 50%+ faster. – Note: </a:t>
+              <a:t> — teach a younger student (Grade 4) the dot method.</a:t>
+            </a:r>
+            <a:endParaRPr lang="en-US" sz="1200" dirty="0"/>
+          </a:p>
+          <a:p>
+            <a:pPr algn="l" marL="342900" indent="-342900">
+              <a:lnSpc>
+                <a:spcPts val="1620"/>
+              </a:lnSpc>
+              <a:spcAft>
+                <a:spcPts val="300"/>
+              </a:spcAft>
+              <a:buSzPct val="100000"/>
+              <a:buChar char="•"/>
+            </a:pPr>
+            <a:r>
+              <a:rPr lang="en-US" sz="1200" b="1" dirty="0">
+                <a:solidFill>
+                  <a:srgbClr val="1C2833"/>
+                </a:solidFill>
+                <a:latin typeface="Arial" pitchFamily="34" charset="0"/>
+                <a:ea typeface="Arial" pitchFamily="34" charset="-122"/>
+                <a:cs typeface="Arial" pitchFamily="34" charset="-120"/>
+              </a:rPr>
+              <a:t>Printed workbook</a:t>
             </a:r>
             <a:pPr algn="l" indent="0" marL="0">
               <a:lnSpc>
-                <a:spcPts val="1680"/>
-              </a:lnSpc>
-              <a:spcBef>
-                <a:spcPts val="300"/>
-              </a:spcBef>
-              <a:spcAft>
-                <a:spcPts val="300"/>
-              </a:spcAft>
-              <a:buNone/>
-            </a:pPr>
-            <a:r>
-              <a:rPr lang="en-US" sz="1200" i="1" dirty="0">
-                <a:solidFill>
-                  <a:srgbClr val="1C2833"/>
-                </a:solidFill>
-                <a:latin typeface="Arial" pitchFamily="34" charset="0"/>
-                <a:ea typeface="Arial" pitchFamily="34" charset="-122"/>
-                <a:cs typeface="Arial" pitchFamily="34" charset="-120"/>
-              </a:rPr>
-              <a:t>"Whatever your gain, you've learned a real technique that will keep speeding up with use."</a:t>
+                <a:spcPts val="1620"/>
+              </a:lnSpc>
+              <a:spcAft>
+                <a:spcPts val="300"/>
+              </a:spcAft>
+              <a:buNone/>
+            </a:pPr>
+            <a:r>
+              <a:rPr lang="en-US" sz="1200" dirty="0">
+                <a:solidFill>
+                  <a:srgbClr val="1C2833"/>
+                </a:solidFill>
+                <a:latin typeface="Arial" pitchFamily="34" charset="0"/>
+                <a:ea typeface="Arial" pitchFamily="34" charset="-122"/>
+                <a:cs typeface="Arial" pitchFamily="34" charset="-120"/>
+              </a:rPr>
+              <a:t> — 20 problems with worked solutions using the dot method, designed for self-study.</a:t>
+            </a:r>
+            <a:endParaRPr lang="en-US" sz="1200" dirty="0"/>
+          </a:p>
+          <a:p>
+            <a:pPr algn="l" marL="342900" indent="-342900">
+              <a:lnSpc>
+                <a:spcPts val="1620"/>
+              </a:lnSpc>
+              <a:spcAft>
+                <a:spcPts val="300"/>
+              </a:spcAft>
+              <a:buSzPct val="100000"/>
+              <a:buChar char="•"/>
+            </a:pPr>
+            <a:r>
+              <a:rPr lang="en-US" sz="1200" b="1" dirty="0">
+                <a:solidFill>
+                  <a:srgbClr val="1C2833"/>
+                </a:solidFill>
+                <a:latin typeface="Arial" pitchFamily="34" charset="0"/>
+                <a:ea typeface="Arial" pitchFamily="34" charset="-122"/>
+                <a:cs typeface="Arial" pitchFamily="34" charset="-120"/>
+              </a:rPr>
+              <a:t>Comparative speed-test data project</a:t>
             </a:r>
             <a:pPr algn="l" indent="0" marL="0">
               <a:lnSpc>
-                <a:spcPts val="1680"/>
-              </a:lnSpc>
-              <a:spcBef>
-                <a:spcPts val="300"/>
-              </a:spcBef>
+                <a:spcPts val="1620"/>
+              </a:lnSpc>
               <a:spcAft>
                 <a:spcPts val="300"/>
               </a:spcAft>
@@ -5007,76 +6336,7 @@
                 <a:ea typeface="Arial" pitchFamily="34" charset="-122"/>
                 <a:cs typeface="Arial" pitchFamily="34" charset="-120"/>
               </a:rPr>
-              <a:t> – Preview Day 6: </a:t>
-            </a:r>
-            <a:pPr algn="l" indent="0" marL="0">
-              <a:lnSpc>
-                <a:spcPts val="1680"/>
-              </a:lnSpc>
-              <a:spcBef>
-                <a:spcPts val="300"/>
-              </a:spcBef>
-              <a:spcAft>
-                <a:spcPts val="300"/>
-              </a:spcAft>
-              <a:buNone/>
-            </a:pPr>
-            <a:r>
-              <a:rPr lang="en-US" sz="1200" i="1" dirty="0">
-                <a:solidFill>
-                  <a:srgbClr val="1C2833"/>
-                </a:solidFill>
-                <a:latin typeface="Arial" pitchFamily="34" charset="0"/>
-                <a:ea typeface="Arial" pitchFamily="34" charset="-122"/>
-                <a:cs typeface="Arial" pitchFamily="34" charset="-120"/>
-              </a:rPr>
-              <a:t>"Tomorrow we ask:</a:t>
-            </a:r>
-            <a:pPr algn="l" indent="0" marL="0">
-              <a:lnSpc>
-                <a:spcPts val="1680"/>
-              </a:lnSpc>
-              <a:spcBef>
-                <a:spcPts val="300"/>
-              </a:spcBef>
-              <a:spcAft>
-                <a:spcPts val="300"/>
-              </a:spcAft>
-              <a:buNone/>
-            </a:pPr>
-            <a:r>
-              <a:rPr lang="en-US" sz="1200" dirty="0">
-                <a:solidFill>
-                  <a:srgbClr val="1C2833"/>
-                </a:solidFill>
-                <a:latin typeface="Arial" pitchFamily="34" charset="0"/>
-                <a:ea typeface="Arial" pitchFamily="34" charset="-122"/>
-                <a:cs typeface="Arial" pitchFamily="34" charset="-120"/>
-              </a:rPr>
-              <a:t>why</a:t>
-            </a:r>
-            <a:pPr algn="l" indent="0" marL="0">
-              <a:lnSpc>
-                <a:spcPts val="1680"/>
-              </a:lnSpc>
-              <a:spcBef>
-                <a:spcPts val="300"/>
-              </a:spcBef>
-              <a:spcAft>
-                <a:spcPts val="300"/>
-              </a:spcAft>
-              <a:buNone/>
-            </a:pPr>
-            <a:r>
-              <a:rPr lang="en-US" sz="1200" i="1" dirty="0">
-                <a:solidFill>
-                  <a:srgbClr val="1C2833"/>
-                </a:solidFill>
-                <a:latin typeface="Arial" pitchFamily="34" charset="0"/>
-                <a:ea typeface="Arial" pitchFamily="34" charset="-122"/>
-                <a:cs typeface="Arial" pitchFamily="34" charset="-120"/>
-              </a:rPr>
-              <a:t> does this work? You'll write a paragraph explaining it in your own words."</a:t>
+              <a:t> — collect Day-1-style baseline + Day-5-style retest data from 5–10 family members or schoolmates. Plot the results.</a:t>
             </a:r>
             <a:endParaRPr lang="en-US" sz="1200" dirty="0"/>
           </a:p>
@@ -5234,7 +6494,7 @@
                 <a:ea typeface="Georgia" pitchFamily="34" charset="-122"/>
                 <a:cs typeface="Georgia" pitchFamily="34" charset="-120"/>
               </a:rPr>
-              <a:t>Student-facing content</a:t>
+              <a:t>Project commitment (15 min) (cont.)</a:t>
             </a:r>
             <a:endParaRPr lang="en-US" sz="1800" dirty="0"/>
           </a:p>
@@ -5248,61 +6508,8 @@
         </p:nvSpPr>
         <p:spPr>
           <a:xfrm>
-            <a:off x="406301" y="883593"/>
-            <a:ext cx="8331398" cy="2457450"/>
-          </a:xfrm>
-          <a:prstGeom prst="rect">
-            <a:avLst/>
-          </a:prstGeom>
-          <a:solidFill>
-            <a:srgbClr val="F4F8F9"/>
-          </a:solidFill>
-          <a:ln/>
-        </p:spPr>
-        <p:txBody>
-          <a:bodyPr wrap="square" rtlCol="0" anchor="ctr"/>
-          <a:lstStyle/>
-          <a:p>
-            <a:pPr indent="0" marL="0">
-              <a:buNone/>
-            </a:pPr>
-            <a:endParaRPr lang="en-US" dirty="0"/>
-          </a:p>
-        </p:txBody>
-      </p:sp>
-      <p:sp>
-        <p:nvSpPr>
-          <p:cNvPr id="5" name="Shape 3"/>
-          <p:cNvSpPr/>
-          <p:nvPr/>
-        </p:nvSpPr>
-        <p:spPr>
-          <a:xfrm>
-            <a:off x="434876" y="883593"/>
-            <a:ext cx="0" cy="2457450"/>
-          </a:xfrm>
-          <a:prstGeom prst="line">
-            <a:avLst/>
-          </a:prstGeom>
-          <a:noFill/>
-          <a:ln w="57150">
-            <a:solidFill>
-              <a:srgbClr val="FE4447"/>
-            </a:solidFill>
-            <a:prstDash val="solid"/>
-          </a:ln>
-        </p:spPr>
-      </p:sp>
-      <p:sp>
-        <p:nvSpPr>
-          <p:cNvPr id="6" name="Text 4"/>
-          <p:cNvSpPr/>
-          <p:nvPr/>
-        </p:nvSpPr>
-        <p:spPr>
-          <a:xfrm>
-            <a:off x="692051" y="1074093"/>
-            <a:ext cx="7973389" cy="230981"/>
+            <a:off x="634901" y="883593"/>
+            <a:ext cx="8102798" cy="525661"/>
           </a:xfrm>
           <a:prstGeom prst="rect">
             <a:avLst/>
@@ -5314,370 +6521,58 @@
           <a:bodyPr wrap="square" lIns="0" tIns="0" rIns="0" bIns="0" rtlCol="0" anchor="t"/>
           <a:lstStyle/>
           <a:p>
-            <a:pPr algn="l" indent="0" marL="0">
-              <a:lnSpc>
-                <a:spcPts val="1820"/>
-              </a:lnSpc>
-              <a:spcBef>
-                <a:spcPts val="300"/>
-              </a:spcBef>
-              <a:spcAft>
-                <a:spcPts val="300"/>
-              </a:spcAft>
-              <a:buNone/>
-            </a:pPr>
-            <a:r>
-              <a:rPr lang="en-US" sz="1300" b="1" i="1" dirty="0">
-                <a:solidFill>
-                  <a:srgbClr val="1C2833"/>
-                </a:solidFill>
-                <a:latin typeface="Georgia" pitchFamily="34" charset="0"/>
-                <a:ea typeface="Georgia" pitchFamily="34" charset="-122"/>
-                <a:cs typeface="Georgia" pitchFamily="34" charset="-120"/>
-              </a:rPr>
-              <a:t>The retest</a:t>
-            </a:r>
-            <a:endParaRPr lang="en-US" sz="1300" dirty="0"/>
-          </a:p>
-        </p:txBody>
-      </p:sp>
-      <p:sp>
-        <p:nvSpPr>
-          <p:cNvPr id="7" name="Text 5"/>
-          <p:cNvSpPr/>
-          <p:nvPr/>
-        </p:nvSpPr>
-        <p:spPr>
-          <a:xfrm>
-            <a:off x="692051" y="1343174"/>
-            <a:ext cx="7973389" cy="230981"/>
-          </a:xfrm>
-          <a:prstGeom prst="rect">
-            <a:avLst/>
-          </a:prstGeom>
-          <a:noFill/>
-          <a:ln/>
-        </p:spPr>
-        <p:txBody>
-          <a:bodyPr wrap="square" lIns="0" tIns="0" rIns="0" bIns="0" rtlCol="0" anchor="t"/>
-          <a:lstStyle/>
-          <a:p>
-            <a:pPr algn="l" indent="0" marL="0">
-              <a:lnSpc>
-                <a:spcPts val="1820"/>
-              </a:lnSpc>
-              <a:spcBef>
-                <a:spcPts val="300"/>
-              </a:spcBef>
-              <a:spcAft>
-                <a:spcPts val="300"/>
-              </a:spcAft>
-              <a:buNone/>
-            </a:pPr>
-            <a:r>
-              <a:rPr lang="en-US" sz="1300" i="1" dirty="0">
-                <a:solidFill>
-                  <a:srgbClr val="1C2833"/>
-                </a:solidFill>
-                <a:latin typeface="Georgia" pitchFamily="34" charset="0"/>
-                <a:ea typeface="Georgia" pitchFamily="34" charset="-122"/>
-                <a:cs typeface="Georgia" pitchFamily="34" charset="-120"/>
-              </a:rPr>
-              <a:t>Same problem as Day 1: 5728 + 3417 + 6892 + 4536 = ?</a:t>
-            </a:r>
-            <a:endParaRPr lang="en-US" sz="1300" dirty="0"/>
-          </a:p>
-        </p:txBody>
-      </p:sp>
-      <p:sp>
-        <p:nvSpPr>
-          <p:cNvPr id="8" name="Text 6"/>
-          <p:cNvSpPr/>
-          <p:nvPr/>
-        </p:nvSpPr>
-        <p:spPr>
-          <a:xfrm>
-            <a:off x="692051" y="1612255"/>
-            <a:ext cx="7973389" cy="230981"/>
-          </a:xfrm>
-          <a:prstGeom prst="rect">
-            <a:avLst/>
-          </a:prstGeom>
-          <a:noFill/>
-          <a:ln/>
-        </p:spPr>
-        <p:txBody>
-          <a:bodyPr wrap="square" lIns="0" tIns="0" rIns="0" bIns="0" rtlCol="0" anchor="t"/>
-          <a:lstStyle/>
-          <a:p>
-            <a:pPr algn="l" indent="0" marL="0">
-              <a:lnSpc>
-                <a:spcPts val="1820"/>
-              </a:lnSpc>
-              <a:spcBef>
-                <a:spcPts val="300"/>
-              </a:spcBef>
-              <a:spcAft>
-                <a:spcPts val="300"/>
-              </a:spcAft>
-              <a:buNone/>
-            </a:pPr>
-            <a:r>
-              <a:rPr lang="en-US" sz="1300" dirty="0">
-                <a:solidFill>
-                  <a:srgbClr val="1C2833"/>
-                </a:solidFill>
-                <a:latin typeface="Georgia" pitchFamily="34" charset="0"/>
-                <a:ea typeface="Georgia" pitchFamily="34" charset="-122"/>
-                <a:cs typeface="Georgia" pitchFamily="34" charset="-120"/>
-              </a:rPr>
-              <a:t>Day 1 time (baseline): ____ sec Day 5 time (dot method): ____ sec </a:t>
-            </a:r>
-            <a:pPr algn="l" indent="0" marL="0">
-              <a:lnSpc>
-                <a:spcPts val="1820"/>
-              </a:lnSpc>
-              <a:spcBef>
-                <a:spcPts val="300"/>
-              </a:spcBef>
-              <a:spcAft>
-                <a:spcPts val="300"/>
-              </a:spcAft>
-              <a:buNone/>
-            </a:pPr>
-            <a:r>
-              <a:rPr lang="en-US" sz="1300" b="1" i="1" dirty="0">
-                <a:solidFill>
-                  <a:srgbClr val="1C2833"/>
-                </a:solidFill>
-                <a:latin typeface="Georgia" pitchFamily="34" charset="0"/>
-                <a:ea typeface="Georgia" pitchFamily="34" charset="-122"/>
-                <a:cs typeface="Georgia" pitchFamily="34" charset="-120"/>
-              </a:rPr>
-              <a:t>% change:</a:t>
-            </a:r>
-            <a:pPr algn="l" indent="0" marL="0">
-              <a:lnSpc>
-                <a:spcPts val="1820"/>
-              </a:lnSpc>
-              <a:spcBef>
-                <a:spcPts val="300"/>
-              </a:spcBef>
-              <a:spcAft>
-                <a:spcPts val="300"/>
-              </a:spcAft>
-              <a:buNone/>
-            </a:pPr>
-            <a:r>
-              <a:rPr lang="en-US" sz="1300" dirty="0">
-                <a:solidFill>
-                  <a:srgbClr val="1C2833"/>
-                </a:solidFill>
-                <a:latin typeface="Georgia" pitchFamily="34" charset="0"/>
-                <a:ea typeface="Georgia" pitchFamily="34" charset="-122"/>
-                <a:cs typeface="Georgia" pitchFamily="34" charset="-120"/>
-              </a:rPr>
-              <a:t> ___________</a:t>
-            </a:r>
-            <a:endParaRPr lang="en-US" sz="1300" dirty="0"/>
-          </a:p>
-        </p:txBody>
-      </p:sp>
-      <p:sp>
-        <p:nvSpPr>
-          <p:cNvPr id="9" name="Text 7"/>
-          <p:cNvSpPr/>
-          <p:nvPr/>
-        </p:nvSpPr>
-        <p:spPr>
-          <a:xfrm>
-            <a:off x="692051" y="1881336"/>
-            <a:ext cx="7973389" cy="230981"/>
-          </a:xfrm>
-          <a:prstGeom prst="rect">
-            <a:avLst/>
-          </a:prstGeom>
-          <a:noFill/>
-          <a:ln/>
-        </p:spPr>
-        <p:txBody>
-          <a:bodyPr wrap="square" lIns="0" tIns="0" rIns="0" bIns="0" rtlCol="0" anchor="t"/>
-          <a:lstStyle/>
-          <a:p>
-            <a:pPr algn="l" indent="0" marL="0">
-              <a:lnSpc>
-                <a:spcPts val="1820"/>
-              </a:lnSpc>
-              <a:spcBef>
-                <a:spcPts val="300"/>
-              </a:spcBef>
-              <a:spcAft>
-                <a:spcPts val="300"/>
-              </a:spcAft>
-              <a:buNone/>
-            </a:pPr>
-            <a:r>
-              <a:rPr lang="en-US" sz="1300" b="1" i="1" dirty="0">
-                <a:solidFill>
-                  <a:srgbClr val="1C2833"/>
-                </a:solidFill>
-                <a:latin typeface="Georgia" pitchFamily="34" charset="0"/>
-                <a:ea typeface="Georgia" pitchFamily="34" charset="-122"/>
-                <a:cs typeface="Georgia" pitchFamily="34" charset="-120"/>
-              </a:rPr>
-              <a:t>Project choice (decide today):</a:t>
-            </a:r>
-            <a:endParaRPr lang="en-US" sz="1300" dirty="0"/>
-          </a:p>
-        </p:txBody>
-      </p:sp>
-      <p:sp>
-        <p:nvSpPr>
-          <p:cNvPr id="10" name="Text 8"/>
-          <p:cNvSpPr/>
-          <p:nvPr/>
-        </p:nvSpPr>
-        <p:spPr>
-          <a:xfrm>
-            <a:off x="692051" y="2150418"/>
-            <a:ext cx="7973389" cy="461963"/>
-          </a:xfrm>
-          <a:prstGeom prst="rect">
-            <a:avLst/>
-          </a:prstGeom>
-          <a:noFill/>
-          <a:ln/>
-        </p:spPr>
-        <p:txBody>
-          <a:bodyPr wrap="square" lIns="0" tIns="0" rIns="0" bIns="0" rtlCol="0" anchor="t"/>
-          <a:lstStyle/>
-          <a:p>
-            <a:pPr algn="l" indent="0" marL="0">
-              <a:lnSpc>
-                <a:spcPts val="1820"/>
-              </a:lnSpc>
-              <a:spcBef>
-                <a:spcPts val="300"/>
-              </a:spcBef>
-              <a:spcAft>
-                <a:spcPts val="300"/>
-              </a:spcAft>
-              <a:buNone/>
-            </a:pPr>
-            <a:r>
-              <a:rPr lang="en-US" sz="1300" i="1" dirty="0">
-                <a:solidFill>
-                  <a:srgbClr val="1C2833"/>
-                </a:solidFill>
-                <a:latin typeface="Georgia" pitchFamily="34" charset="0"/>
-                <a:ea typeface="Georgia" pitchFamily="34" charset="-122"/>
-                <a:cs typeface="Georgia" pitchFamily="34" charset="-120"/>
-              </a:rPr>
-              <a:t>1. 60-second teaching video 2. Printed workbook (20 worked problems) 3. Comparative speed-test data project</a:t>
-            </a:r>
-            <a:endParaRPr lang="en-US" sz="1300" dirty="0"/>
-          </a:p>
-        </p:txBody>
-      </p:sp>
-      <p:sp>
-        <p:nvSpPr>
-          <p:cNvPr id="11" name="Text 9"/>
-          <p:cNvSpPr/>
-          <p:nvPr/>
-        </p:nvSpPr>
-        <p:spPr>
-          <a:xfrm>
-            <a:off x="692051" y="2650480"/>
-            <a:ext cx="7973389" cy="230981"/>
-          </a:xfrm>
-          <a:prstGeom prst="rect">
-            <a:avLst/>
-          </a:prstGeom>
-          <a:noFill/>
-          <a:ln/>
-        </p:spPr>
-        <p:txBody>
-          <a:bodyPr wrap="square" lIns="0" tIns="0" rIns="0" bIns="0" rtlCol="0" anchor="t"/>
-          <a:lstStyle/>
-          <a:p>
-            <a:pPr algn="l" indent="0" marL="0">
-              <a:lnSpc>
-                <a:spcPts val="1820"/>
-              </a:lnSpc>
-              <a:spcBef>
-                <a:spcPts val="300"/>
-              </a:spcBef>
-              <a:spcAft>
-                <a:spcPts val="300"/>
-              </a:spcAft>
-              <a:buNone/>
-            </a:pPr>
-            <a:r>
-              <a:rPr lang="en-US" sz="1300" i="1" dirty="0">
-                <a:solidFill>
-                  <a:srgbClr val="1C2833"/>
-                </a:solidFill>
-                <a:latin typeface="Georgia" pitchFamily="34" charset="0"/>
-                <a:ea typeface="Georgia" pitchFamily="34" charset="-122"/>
-                <a:cs typeface="Georgia" pitchFamily="34" charset="-120"/>
-              </a:rPr>
-              <a:t>Partner: ____________________   Format: ____________________</a:t>
-            </a:r>
-            <a:endParaRPr lang="en-US" sz="1300" dirty="0"/>
-          </a:p>
-        </p:txBody>
-      </p:sp>
-      <p:sp>
-        <p:nvSpPr>
-          <p:cNvPr id="12" name="Text 10"/>
-          <p:cNvSpPr/>
-          <p:nvPr/>
-        </p:nvSpPr>
-        <p:spPr>
-          <a:xfrm>
-            <a:off x="692051" y="2919561"/>
-            <a:ext cx="7973389" cy="230981"/>
-          </a:xfrm>
-          <a:prstGeom prst="rect">
-            <a:avLst/>
-          </a:prstGeom>
-          <a:noFill/>
-          <a:ln/>
-        </p:spPr>
-        <p:txBody>
-          <a:bodyPr wrap="square" lIns="0" tIns="0" rIns="0" bIns="0" rtlCol="0" anchor="t"/>
-          <a:lstStyle/>
-          <a:p>
-            <a:pPr algn="l" indent="0" marL="0">
-              <a:lnSpc>
-                <a:spcPts val="1820"/>
-              </a:lnSpc>
-              <a:spcBef>
-                <a:spcPts val="300"/>
-              </a:spcBef>
-              <a:spcAft>
-                <a:spcPts val="300"/>
-              </a:spcAft>
-              <a:buNone/>
-            </a:pPr>
-            <a:r>
-              <a:rPr lang="en-US" sz="1300" i="1" dirty="0">
-                <a:solidFill>
-                  <a:srgbClr val="1C2833"/>
-                </a:solidFill>
-                <a:latin typeface="Georgia" pitchFamily="34" charset="0"/>
-                <a:ea typeface="Georgia" pitchFamily="34" charset="-122"/>
-                <a:cs typeface="Georgia" pitchFamily="34" charset="-120"/>
-              </a:rPr>
-              <a:t>One sentence: what we'll do — ____________________________________________________</a:t>
-            </a:r>
-            <a:endParaRPr lang="en-US" sz="1300" dirty="0"/>
-          </a:p>
-        </p:txBody>
-      </p:sp>
-      <p:sp>
-        <p:nvSpPr>
-          <p:cNvPr id="13" name="Text 11"/>
+            <a:pPr algn="l" marL="342900" indent="-342900">
+              <a:lnSpc>
+                <a:spcPts val="1620"/>
+              </a:lnSpc>
+              <a:spcAft>
+                <a:spcPts val="300"/>
+              </a:spcAft>
+              <a:buSzPct val="100000"/>
+              <a:buChar char="•"/>
+            </a:pPr>
+            <a:r>
+              <a:rPr lang="en-US" sz="1200" dirty="0">
+                <a:solidFill>
+                  <a:srgbClr val="1C2833"/>
+                </a:solidFill>
+                <a:latin typeface="Arial" pitchFamily="34" charset="0"/>
+                <a:ea typeface="Arial" pitchFamily="34" charset="-122"/>
+                <a:cs typeface="Arial" pitchFamily="34" charset="-120"/>
+              </a:rPr>
+              <a:t>Pairs (or individuals) choose a format AND a partner by end of class.</a:t>
+            </a:r>
+            <a:endParaRPr lang="en-US" sz="1200" dirty="0"/>
+          </a:p>
+          <a:p>
+            <a:pPr algn="l" marL="342900" indent="-342900">
+              <a:lnSpc>
+                <a:spcPts val="1620"/>
+              </a:lnSpc>
+              <a:spcAft>
+                <a:spcPts val="300"/>
+              </a:spcAft>
+              <a:buSzPct val="100000"/>
+              <a:buChar char="•"/>
+            </a:pPr>
+            <a:r>
+              <a:rPr lang="en-US" sz="1200" dirty="0">
+                <a:solidFill>
+                  <a:srgbClr val="1C2833"/>
+                </a:solidFill>
+                <a:latin typeface="Arial" pitchFamily="34" charset="0"/>
+                <a:ea typeface="Arial" pitchFamily="34" charset="-122"/>
+                <a:cs typeface="Arial" pitchFamily="34" charset="-120"/>
+              </a:rPr>
+              <a:t>Each pair writes a 1-sentence "what we'll do" on a sticky note, posts to the board under their format.</a:t>
+            </a:r>
+            <a:endParaRPr lang="en-US" sz="1200" dirty="0"/>
+          </a:p>
+        </p:txBody>
+      </p:sp>
+      <p:sp>
+        <p:nvSpPr>
+          <p:cNvPr id="5" name="Text 3"/>
           <p:cNvSpPr/>
           <p:nvPr/>
         </p:nvSpPr>
